--- a/material/presentaciones/S11-crag.pptx
+++ b/material/presentaciones/S11-crag.pptx
@@ -765,100 +765,100 @@
             </a:pPr>
             <a:r>
               <a:rPr lang="en-US"/>
-              <a:t>S11 · 01/15 · 18:30. Límite del RAG básico.</a:t>
-            </a:r>
-            <a:endParaRPr/>
-          </a:p>
-          <a:p>
-            <a:pPr indent="0" lvl="0" marL="0" rtl="0" algn="l">
-              <a:spcBef>
-                <a:spcPts val="0"/>
-              </a:spcBef>
-              <a:spcAft>
-                <a:spcPts val="0"/>
-              </a:spcAft>
-              <a:buNone/>
-            </a:pPr>
-            <a:r>
-              <a:t/>
-            </a:r>
-            <a:endParaRPr/>
-          </a:p>
-          <a:p>
-            <a:pPr indent="0" lvl="0" marL="0" rtl="0" algn="l">
-              <a:spcBef>
-                <a:spcPts val="0"/>
-              </a:spcBef>
-              <a:spcAft>
-                <a:spcPts val="0"/>
-              </a:spcAft>
-              <a:buNone/>
-            </a:pPr>
-            <a:r>
-              <a:rPr lang="en-US"/>
-              <a:t>Di: el jueves vimos una búsqueda. Hoy la misma app puede conservar, descartar y buscar otra vez.</a:t>
-            </a:r>
-            <a:endParaRPr/>
-          </a:p>
-          <a:p>
-            <a:pPr indent="0" lvl="0" marL="0" rtl="0" algn="l">
-              <a:spcBef>
-                <a:spcPts val="0"/>
-              </a:spcBef>
-              <a:spcAft>
-                <a:spcPts val="0"/>
-              </a:spcAft>
-              <a:buNone/>
-            </a:pPr>
-            <a:r>
-              <a:t/>
-            </a:r>
-            <a:endParaRPr/>
-          </a:p>
-          <a:p>
-            <a:pPr indent="0" lvl="0" marL="0" rtl="0" algn="l">
-              <a:spcBef>
-                <a:spcPts val="0"/>
-              </a:spcBef>
-              <a:spcAft>
-                <a:spcPts val="0"/>
-              </a:spcAft>
-              <a:buNone/>
-            </a:pPr>
-            <a:r>
-              <a:rPr lang="en-US"/>
-              <a:t>No prometas que CRAG gana. La complejidad añade latencia y llamadas.</a:t>
-            </a:r>
-            <a:endParaRPr/>
-          </a:p>
-          <a:p>
-            <a:pPr indent="0" lvl="0" marL="0" rtl="0" algn="l">
-              <a:spcBef>
-                <a:spcPts val="0"/>
-              </a:spcBef>
-              <a:spcAft>
-                <a:spcPts val="0"/>
-              </a:spcAft>
-              <a:buNone/>
-            </a:pPr>
-            <a:r>
-              <a:t/>
-            </a:r>
-            <a:endParaRPr/>
-          </a:p>
-          <a:p>
-            <a:pPr indent="0" lvl="0" marL="0" rtl="0" algn="l">
-              <a:spcBef>
-                <a:spcPts val="0"/>
-              </a:spcBef>
-              <a:spcAft>
-                <a:spcPts val="0"/>
-              </a:spcAft>
-              <a:buNone/>
-            </a:pPr>
-            <a:r>
-              <a:rPr lang="en-US"/>
-              <a:t>El diagrama es la adaptación de clase, no el artículo.</a:t>
+              <a:t>S11 · 01/15 · 18:30. Objetivo de S11: evolucionar el asistente y el laboratorio de S10 hacia Corrective RAG (CRAG) manteniendo intacto el RAG básico para compararlos. El grafo separa recuperar (hasta 10 candidatos), reordenar en escala [0, 1], valorar suficiencia y reformular hasta 2 veces (3 búsquedas en total).</a:t>
+            </a:r>
+            <a:endParaRPr/>
+          </a:p>
+          <a:p>
+            <a:pPr indent="0" lvl="0" marL="0" rtl="0" algn="l">
+              <a:spcBef>
+                <a:spcPts val="0"/>
+              </a:spcBef>
+              <a:spcAft>
+                <a:spcPts val="0"/>
+              </a:spcAft>
+              <a:buNone/>
+            </a:pPr>
+            <a:r>
+              <a:t/>
+            </a:r>
+            <a:endParaRPr/>
+          </a:p>
+          <a:p>
+            <a:pPr indent="0" lvl="0" marL="0" rtl="0" algn="l">
+              <a:spcBef>
+                <a:spcPts val="0"/>
+              </a:spcBef>
+              <a:spcAft>
+                <a:spcPts val="0"/>
+              </a:spcAft>
+              <a:buNone/>
+            </a:pPr>
+            <a:r>
+              <a:rPr lang="en-US"/>
+              <a:t/>
+            </a:r>
+            <a:endParaRPr/>
+          </a:p>
+          <a:p>
+            <a:pPr indent="0" lvl="0" marL="0" rtl="0" algn="l">
+              <a:spcBef>
+                <a:spcPts val="0"/>
+              </a:spcBef>
+              <a:spcAft>
+                <a:spcPts val="0"/>
+              </a:spcAft>
+              <a:buNone/>
+            </a:pPr>
+            <a:r>
+              <a:t/>
+            </a:r>
+            <a:endParaRPr/>
+          </a:p>
+          <a:p>
+            <a:pPr indent="0" lvl="0" marL="0" rtl="0" algn="l">
+              <a:spcBef>
+                <a:spcPts val="0"/>
+              </a:spcBef>
+              <a:spcAft>
+                <a:spcPts val="0"/>
+              </a:spcAft>
+              <a:buNone/>
+            </a:pPr>
+            <a:r>
+              <a:rPr lang="en-US"/>
+              <a:t/>
+            </a:r>
+            <a:endParaRPr/>
+          </a:p>
+          <a:p>
+            <a:pPr indent="0" lvl="0" marL="0" rtl="0" algn="l">
+              <a:spcBef>
+                <a:spcPts val="0"/>
+              </a:spcBef>
+              <a:spcAft>
+                <a:spcPts val="0"/>
+              </a:spcAft>
+              <a:buNone/>
+            </a:pPr>
+            <a:r>
+              <a:t/>
+            </a:r>
+            <a:endParaRPr/>
+          </a:p>
+          <a:p>
+            <a:pPr indent="0" lvl="0" marL="0" rtl="0" algn="l">
+              <a:spcBef>
+                <a:spcPts val="0"/>
+              </a:spcBef>
+              <a:spcAft>
+                <a:spcPts val="0"/>
+              </a:spcAft>
+              <a:buNone/>
+            </a:pPr>
+            <a:r>
+              <a:rPr lang="en-US"/>
+              <a:t/>
             </a:r>
             <a:endParaRPr/>
           </a:p>
@@ -1425,116 +1425,116 @@
             </a:pPr>
             <a:r>
               <a:rPr lang="en-US"/>
-              <a:t>S11 · 10/15 · bloque 45–65. Límites.</a:t>
-            </a:r>
-            <a:endParaRPr/>
-          </a:p>
-          <a:p>
-            <a:pPr indent="0" lvl="0" marL="0" rtl="0" algn="l">
-              <a:spcBef>
-                <a:spcPts val="0"/>
-              </a:spcBef>
-              <a:spcAft>
-                <a:spcPts val="0"/>
-              </a:spcAft>
-              <a:buNone/>
-            </a:pPr>
-            <a:r>
-              <a:t/>
-            </a:r>
-            <a:endParaRPr/>
-          </a:p>
-          <a:p>
-            <a:pPr indent="0" lvl="0" marL="0" rtl="0" algn="l">
-              <a:spcBef>
-                <a:spcPts val="0"/>
-              </a:spcBef>
-              <a:spcAft>
-                <a:spcPts val="0"/>
-              </a:spcAft>
-              <a:buNone/>
-            </a:pPr>
-            <a:r>
-              <a:rPr lang="en-US"/>
-              <a:t>Guion de dato ausente: tres búsquedas, dos reformulaciones, rechazo, sin cita y sin generación.</a:t>
-            </a:r>
-            <a:endParaRPr/>
-          </a:p>
-          <a:p>
-            <a:pPr indent="0" lvl="0" marL="0" rtl="0" algn="l">
-              <a:spcBef>
-                <a:spcPts val="0"/>
-              </a:spcBef>
-              <a:spcAft>
-                <a:spcPts val="0"/>
-              </a:spcAft>
-              <a:buNone/>
-            </a:pPr>
-            <a:r>
-              <a:t/>
-            </a:r>
-            <a:endParaRPr/>
-          </a:p>
-          <a:p>
-            <a:pPr indent="0" lvl="0" marL="0" rtl="0" algn="l">
-              <a:spcBef>
-                <a:spcPts val="0"/>
-              </a:spcBef>
-              <a:spcAft>
-                <a:spcPts val="0"/>
-              </a:spcAft>
-              <a:buNone/>
-            </a:pPr>
-            <a:r>
-              <a:rPr lang="en-US"/>
-              <a:t>Guion de calendario: cero búsquedas.</a:t>
-            </a:r>
-            <a:endParaRPr/>
-          </a:p>
-          <a:p>
-            <a:pPr indent="0" lvl="0" marL="0" rtl="0" algn="l">
-              <a:spcBef>
-                <a:spcPts val="0"/>
-              </a:spcBef>
-              <a:spcAft>
-                <a:spcPts val="0"/>
-              </a:spcAft>
-              <a:buNone/>
-            </a:pPr>
-            <a:r>
-              <a:t/>
-            </a:r>
-            <a:endParaRPr/>
-          </a:p>
-          <a:p>
-            <a:pPr indent="0" lvl="0" marL="0" rtl="0" algn="l">
-              <a:spcBef>
-                <a:spcPts val="0"/>
-              </a:spcBef>
-              <a:spcAft>
-                <a:spcPts val="0"/>
-              </a:spcAft>
-              <a:buNone/>
-            </a:pPr>
-            <a:r>
-              <a:rPr lang="en-US"/>
-              <a:t>Guion de fallo del evaluador: una evaluación inválida, sin reintento.</a:t>
-            </a:r>
-            <a:endParaRPr/>
-          </a:p>
-          <a:p>
-            <a:pPr indent="0" lvl="0" marL="0" rtl="0" algn="l">
-              <a:spcBef>
-                <a:spcPts val="0"/>
-              </a:spcBef>
-              <a:spcAft>
-                <a:spcPts val="0"/>
-              </a:spcAft>
-              <a:buNone/>
-            </a:pPr>
-            <a:r>
-              <a:rPr lang="en-US"/>
-              <a:t>El plazo es uno de 20 s. Parar la espera no cancela un cómputo que un proveedor ya hubiera empezado. En demo no hay proveedor.</a:t>
+              <a:t>S11 · 10/15 · bloque 45–65 min. Límites de código: máximo 3 búsquedas (la inicial más 2 reformulaciones) y plazo total de 20 s por turno. En la pregunta de la beca de 1991 (o criptomonedas en lab/), tras 3 búsquedas y 2 reformulaciones sin alcanzar cobertura suficiente, el grafo termina en refuse con 0 llamadas al generador.</a:t>
+            </a:r>
+            <a:endParaRPr/>
+          </a:p>
+          <a:p>
+            <a:pPr indent="0" lvl="0" marL="0" rtl="0" algn="l">
+              <a:spcBef>
+                <a:spcPts val="0"/>
+              </a:spcBef>
+              <a:spcAft>
+                <a:spcPts val="0"/>
+              </a:spcAft>
+              <a:buNone/>
+            </a:pPr>
+            <a:r>
+              <a:t/>
+            </a:r>
+            <a:endParaRPr/>
+          </a:p>
+          <a:p>
+            <a:pPr indent="0" lvl="0" marL="0" rtl="0" algn="l">
+              <a:spcBef>
+                <a:spcPts val="0"/>
+              </a:spcBef>
+              <a:spcAft>
+                <a:spcPts val="0"/>
+              </a:spcAft>
+              <a:buNone/>
+            </a:pPr>
+            <a:r>
+              <a:rPr lang="en-US"/>
+              <a:t/>
+            </a:r>
+            <a:endParaRPr/>
+          </a:p>
+          <a:p>
+            <a:pPr indent="0" lvl="0" marL="0" rtl="0" algn="l">
+              <a:spcBef>
+                <a:spcPts val="0"/>
+              </a:spcBef>
+              <a:spcAft>
+                <a:spcPts val="0"/>
+              </a:spcAft>
+              <a:buNone/>
+            </a:pPr>
+            <a:r>
+              <a:t/>
+            </a:r>
+            <a:endParaRPr/>
+          </a:p>
+          <a:p>
+            <a:pPr indent="0" lvl="0" marL="0" rtl="0" algn="l">
+              <a:spcBef>
+                <a:spcPts val="0"/>
+              </a:spcBef>
+              <a:spcAft>
+                <a:spcPts val="0"/>
+              </a:spcAft>
+              <a:buNone/>
+            </a:pPr>
+            <a:r>
+              <a:rPr lang="en-US"/>
+              <a:t/>
+            </a:r>
+            <a:endParaRPr/>
+          </a:p>
+          <a:p>
+            <a:pPr indent="0" lvl="0" marL="0" rtl="0" algn="l">
+              <a:spcBef>
+                <a:spcPts val="0"/>
+              </a:spcBef>
+              <a:spcAft>
+                <a:spcPts val="0"/>
+              </a:spcAft>
+              <a:buNone/>
+            </a:pPr>
+            <a:r>
+              <a:t/>
+            </a:r>
+            <a:endParaRPr/>
+          </a:p>
+          <a:p>
+            <a:pPr indent="0" lvl="0" marL="0" rtl="0" algn="l">
+              <a:spcBef>
+                <a:spcPts val="0"/>
+              </a:spcBef>
+              <a:spcAft>
+                <a:spcPts val="0"/>
+              </a:spcAft>
+              <a:buNone/>
+            </a:pPr>
+            <a:r>
+              <a:rPr lang="en-US"/>
+              <a:t/>
+            </a:r>
+            <a:endParaRPr/>
+          </a:p>
+          <a:p>
+            <a:pPr indent="0" lvl="0" marL="0" rtl="0" algn="l">
+              <a:spcBef>
+                <a:spcPts val="0"/>
+              </a:spcBef>
+              <a:spcAft>
+                <a:spcPts val="0"/>
+              </a:spcAft>
+              <a:buNone/>
+            </a:pPr>
+            <a:r>
+              <a:rPr lang="en-US"/>
+              <a:t/>
             </a:r>
             <a:endParaRPr/>
           </a:p>
@@ -2354,100 +2354,100 @@
             </a:pPr>
             <a:r>
               <a:rPr lang="en-US"/>
-              <a:t>S11 · 08/15 · conservar y deduplicar.</a:t>
-            </a:r>
-            <a:endParaRPr/>
-          </a:p>
-          <a:p>
-            <a:pPr indent="0" lvl="0" marL="0" rtl="0" algn="l">
-              <a:spcBef>
-                <a:spcPts val="0"/>
-              </a:spcBef>
-              <a:spcAft>
-                <a:spcPts val="0"/>
-              </a:spcAft>
-              <a:buNone/>
-            </a:pPr>
-            <a:r>
-              <a:t/>
-            </a:r>
-            <a:endParaRPr/>
-          </a:p>
-          <a:p>
-            <a:pPr indent="0" lvl="0" marL="0" rtl="0" algn="l">
-              <a:spcBef>
-                <a:spcPts val="0"/>
-              </a:spcBef>
-              <a:spcAft>
-                <a:spcPts val="0"/>
-              </a:spcAft>
-              <a:buNone/>
-            </a:pPr>
-            <a:r>
-              <a:rPr lang="en-US"/>
-              <a:t>Guion: Evidencia parcial y segunda búsqueda.</a:t>
-            </a:r>
-            <a:endParaRPr/>
-          </a:p>
-          <a:p>
-            <a:pPr indent="0" lvl="0" marL="0" rtl="0" algn="l">
-              <a:spcBef>
-                <a:spcPts val="0"/>
-              </a:spcBef>
-              <a:spcAft>
-                <a:spcPts val="0"/>
-              </a:spcAft>
-              <a:buNone/>
-            </a:pPr>
-            <a:r>
-              <a:t/>
-            </a:r>
-            <a:endParaRPr/>
-          </a:p>
-          <a:p>
-            <a:pPr indent="0" lvl="0" marL="0" rtl="0" algn="l">
-              <a:spcBef>
-                <a:spcPts val="0"/>
-              </a:spcBef>
-              <a:spcAft>
-                <a:spcPts val="0"/>
-              </a:spcAft>
-              <a:buNone/>
-            </a:pPr>
-            <a:r>
-              <a:rPr lang="en-US"/>
-              <a:t>Debe conservar S5, recuperar S6 y citar las dos, sin duplicar.</a:t>
-            </a:r>
-            <a:endParaRPr/>
-          </a:p>
-          <a:p>
-            <a:pPr indent="0" lvl="0" marL="0" rtl="0" algn="l">
-              <a:spcBef>
-                <a:spcPts val="0"/>
-              </a:spcBef>
-              <a:spcAft>
-                <a:spcPts val="0"/>
-              </a:spcAft>
-              <a:buNone/>
-            </a:pPr>
-            <a:r>
-              <a:t/>
-            </a:r>
-            <a:endParaRPr/>
-          </a:p>
-          <a:p>
-            <a:pPr indent="0" lvl="0" marL="0" rtl="0" algn="l">
-              <a:spcBef>
-                <a:spcPts val="0"/>
-              </a:spcBef>
-              <a:spcAft>
-                <a:spcPts val="0"/>
-              </a:spcAft>
-              <a:buNone/>
-            </a:pPr>
-            <a:r>
-              <a:rPr lang="en-US"/>
-              <a:t>El orden mostrado es el del último ranking, no el orden de llegada.</a:t>
+              <a:t>S11 · 08/15 · bloque 25–45 min. Ejemplo completo de evidencia parcial (partial-s5-s6 en el curso y caso 14 en lab/). En la búsqueda 1, S5 recibe score 0,80 (&gt;= 0,50), pero assess detecta la laguna de observabilidad (cobertura 0,50 &lt; 0,75 -&gt; partial). retain conserva S5, reformulate busca Langfuse/LangSmith, la búsqueda 2 recupera S6 (0,86), se unen S6 y S5 sin duplicados y assess declara sufficient.</a:t>
+            </a:r>
+            <a:endParaRPr/>
+          </a:p>
+          <a:p>
+            <a:pPr indent="0" lvl="0" marL="0" rtl="0" algn="l">
+              <a:spcBef>
+                <a:spcPts val="0"/>
+              </a:spcBef>
+              <a:spcAft>
+                <a:spcPts val="0"/>
+              </a:spcAft>
+              <a:buNone/>
+            </a:pPr>
+            <a:r>
+              <a:t/>
+            </a:r>
+            <a:endParaRPr/>
+          </a:p>
+          <a:p>
+            <a:pPr indent="0" lvl="0" marL="0" rtl="0" algn="l">
+              <a:spcBef>
+                <a:spcPts val="0"/>
+              </a:spcBef>
+              <a:spcAft>
+                <a:spcPts val="0"/>
+              </a:spcAft>
+              <a:buNone/>
+            </a:pPr>
+            <a:r>
+              <a:rPr lang="en-US"/>
+              <a:t/>
+            </a:r>
+            <a:endParaRPr/>
+          </a:p>
+          <a:p>
+            <a:pPr indent="0" lvl="0" marL="0" rtl="0" algn="l">
+              <a:spcBef>
+                <a:spcPts val="0"/>
+              </a:spcBef>
+              <a:spcAft>
+                <a:spcPts val="0"/>
+              </a:spcAft>
+              <a:buNone/>
+            </a:pPr>
+            <a:r>
+              <a:t/>
+            </a:r>
+            <a:endParaRPr/>
+          </a:p>
+          <a:p>
+            <a:pPr indent="0" lvl="0" marL="0" rtl="0" algn="l">
+              <a:spcBef>
+                <a:spcPts val="0"/>
+              </a:spcBef>
+              <a:spcAft>
+                <a:spcPts val="0"/>
+              </a:spcAft>
+              <a:buNone/>
+            </a:pPr>
+            <a:r>
+              <a:rPr lang="en-US"/>
+              <a:t/>
+            </a:r>
+            <a:endParaRPr/>
+          </a:p>
+          <a:p>
+            <a:pPr indent="0" lvl="0" marL="0" rtl="0" algn="l">
+              <a:spcBef>
+                <a:spcPts val="0"/>
+              </a:spcBef>
+              <a:spcAft>
+                <a:spcPts val="0"/>
+              </a:spcAft>
+              <a:buNone/>
+            </a:pPr>
+            <a:r>
+              <a:t/>
+            </a:r>
+            <a:endParaRPr/>
+          </a:p>
+          <a:p>
+            <a:pPr indent="0" lvl="0" marL="0" rtl="0" algn="l">
+              <a:spcBef>
+                <a:spcPts val="0"/>
+              </a:spcBef>
+              <a:spcAft>
+                <a:spcPts val="0"/>
+              </a:spcAft>
+              <a:buNone/>
+            </a:pPr>
+            <a:r>
+              <a:rPr lang="en-US"/>
+              <a:t/>
             </a:r>
             <a:endParaRPr/>
           </a:p>
@@ -3283,100 +3283,100 @@
             </a:pPr>
             <a:r>
               <a:rPr lang="en-US"/>
-              <a:t>S11 · 12/15 · bloque 75–80. Ejercicio. 80–90 preguntas.</a:t>
-            </a:r>
-            <a:endParaRPr/>
-          </a:p>
-          <a:p>
-            <a:pPr indent="0" lvl="0" marL="0" rtl="0" algn="l">
-              <a:spcBef>
-                <a:spcPts val="0"/>
-              </a:spcBef>
-              <a:spcAft>
-                <a:spcPts val="0"/>
-              </a:spcAft>
-              <a:buNone/>
-            </a:pPr>
-            <a:r>
-              <a:t/>
-            </a:r>
-            <a:endParaRPr/>
-          </a:p>
-          <a:p>
-            <a:pPr indent="0" lvl="0" marL="0" rtl="0" algn="l">
-              <a:spcBef>
-                <a:spcPts val="0"/>
-              </a:spcBef>
-              <a:spcAft>
-                <a:spcPts val="0"/>
-              </a:spcAft>
-              <a:buNone/>
-            </a:pPr>
-            <a:r>
-              <a:rPr lang="en-US"/>
-              <a:t>Enunciado: material/ejercicios/S11-enunciado.md.</a:t>
-            </a:r>
-            <a:endParaRPr/>
-          </a:p>
-          <a:p>
-            <a:pPr indent="0" lvl="0" marL="0" rtl="0" algn="l">
-              <a:spcBef>
-                <a:spcPts val="0"/>
-              </a:spcBef>
-              <a:spcAft>
-                <a:spcPts val="0"/>
-              </a:spcAft>
-              <a:buNone/>
-            </a:pPr>
-            <a:r>
-              <a:t/>
-            </a:r>
-            <a:endParaRPr/>
-          </a:p>
-          <a:p>
-            <a:pPr indent="0" lvl="0" marL="0" rtl="0" algn="l">
-              <a:spcBef>
-                <a:spcPts val="0"/>
-              </a:spcBef>
-              <a:spcAft>
-                <a:spcPts val="0"/>
-              </a:spcAft>
-              <a:buNone/>
-            </a:pPr>
-            <a:r>
-              <a:rPr lang="en-US"/>
-              <a:t>Hay que conservar el RAG básico al lado del grafo.</a:t>
-            </a:r>
-            <a:endParaRPr/>
-          </a:p>
-          <a:p>
-            <a:pPr indent="0" lvl="0" marL="0" rtl="0" algn="l">
-              <a:spcBef>
-                <a:spcPts val="0"/>
-              </a:spcBef>
-              <a:spcAft>
-                <a:spcPts val="0"/>
-              </a:spcAft>
-              <a:buNone/>
-            </a:pPr>
-            <a:r>
-              <a:t/>
-            </a:r>
-            <a:endParaRPr/>
-          </a:p>
-          <a:p>
-            <a:pPr indent="0" lvl="0" marL="0" rtl="0" algn="l">
-              <a:spcBef>
-                <a:spcPts val="0"/>
-              </a:spcBef>
-              <a:spcAft>
-                <a:spcPts val="0"/>
-              </a:spcAft>
-              <a:buNone/>
-            </a:pPr>
-            <a:r>
-              <a:rPr lang="en-US"/>
-              <a:t>El conjunto reservado del profesor sigue sin ejecutarse y no se reparte. El encargo original pide una comparación de 20 preguntas propias. Un guion fixture no es esa medición. No enseñes una tabla de resultados.</a:t>
+              <a:t>S11 · 12/15 · bloque 75–80 min. Enunciado publicado de S11 (material/ejercicios/S11-enunciado.md): proyecto reconstruible desde 8+ documentos ficticios e índice vacío en PostgreSQL/pgvector (vector(768) + HNSW), conservando el RAG básico de S10, grafo LangGraph con retrieve (top 10) -&gt; rerank ([0, 1], Qwen3-Reranker-0.6B opcional) -&gt; assess -&gt; retain/discard -&gt; reformulate (máx. 2, 3 búsquedas) -&gt; answer/refuse, y comparación ejecutada sobre 20 preguntas nuevas.</a:t>
+            </a:r>
+            <a:endParaRPr/>
+          </a:p>
+          <a:p>
+            <a:pPr indent="0" lvl="0" marL="0" rtl="0" algn="l">
+              <a:spcBef>
+                <a:spcPts val="0"/>
+              </a:spcBef>
+              <a:spcAft>
+                <a:spcPts val="0"/>
+              </a:spcAft>
+              <a:buNone/>
+            </a:pPr>
+            <a:r>
+              <a:t/>
+            </a:r>
+            <a:endParaRPr/>
+          </a:p>
+          <a:p>
+            <a:pPr indent="0" lvl="0" marL="0" rtl="0" algn="l">
+              <a:spcBef>
+                <a:spcPts val="0"/>
+              </a:spcBef>
+              <a:spcAft>
+                <a:spcPts val="0"/>
+              </a:spcAft>
+              <a:buNone/>
+            </a:pPr>
+            <a:r>
+              <a:rPr lang="en-US"/>
+              <a:t/>
+            </a:r>
+            <a:endParaRPr/>
+          </a:p>
+          <a:p>
+            <a:pPr indent="0" lvl="0" marL="0" rtl="0" algn="l">
+              <a:spcBef>
+                <a:spcPts val="0"/>
+              </a:spcBef>
+              <a:spcAft>
+                <a:spcPts val="0"/>
+              </a:spcAft>
+              <a:buNone/>
+            </a:pPr>
+            <a:r>
+              <a:t/>
+            </a:r>
+            <a:endParaRPr/>
+          </a:p>
+          <a:p>
+            <a:pPr indent="0" lvl="0" marL="0" rtl="0" algn="l">
+              <a:spcBef>
+                <a:spcPts val="0"/>
+              </a:spcBef>
+              <a:spcAft>
+                <a:spcPts val="0"/>
+              </a:spcAft>
+              <a:buNone/>
+            </a:pPr>
+            <a:r>
+              <a:rPr lang="en-US"/>
+              <a:t/>
+            </a:r>
+            <a:endParaRPr/>
+          </a:p>
+          <a:p>
+            <a:pPr indent="0" lvl="0" marL="0" rtl="0" algn="l">
+              <a:spcBef>
+                <a:spcPts val="0"/>
+              </a:spcBef>
+              <a:spcAft>
+                <a:spcPts val="0"/>
+              </a:spcAft>
+              <a:buNone/>
+            </a:pPr>
+            <a:r>
+              <a:t/>
+            </a:r>
+            <a:endParaRPr/>
+          </a:p>
+          <a:p>
+            <a:pPr indent="0" lvl="0" marL="0" rtl="0" algn="l">
+              <a:spcBef>
+                <a:spcPts val="0"/>
+              </a:spcBef>
+              <a:spcAft>
+                <a:spcPts val="0"/>
+              </a:spcAft>
+              <a:buNone/>
+            </a:pPr>
+            <a:r>
+              <a:rPr lang="en-US"/>
+              <a:t/>
             </a:r>
             <a:endParaRPr/>
           </a:p>
@@ -3914,100 +3914,100 @@
             </a:pPr>
             <a:r>
               <a:rPr lang="en-US"/>
-              <a:t>Referencia. Protocolo previsto, métricas pendientes.</a:t>
-            </a:r>
-            <a:endParaRPr/>
-          </a:p>
-          <a:p>
-            <a:pPr indent="0" lvl="0" marL="0" rtl="0" algn="l">
-              <a:spcBef>
-                <a:spcPts val="0"/>
-              </a:spcBef>
-              <a:spcAft>
-                <a:spcPts val="0"/>
-              </a:spcAft>
-              <a:buNone/>
-            </a:pPr>
-            <a:r>
-              <a:t/>
-            </a:r>
-            <a:endParaRPr/>
-          </a:p>
-          <a:p>
-            <a:pPr indent="0" lvl="0" marL="0" rtl="0" algn="l">
-              <a:spcBef>
-                <a:spcPts val="0"/>
-              </a:spcBef>
-              <a:spcAft>
-                <a:spcPts val="0"/>
-              </a:spcAft>
-              <a:buNone/>
-            </a:pPr>
-            <a:r>
-              <a:rPr lang="en-US"/>
-              <a:t>Mismo modelo, mismos parámetros, mismo corpus, mismo perfil y conversaciones limpias.</a:t>
-            </a:r>
-            <a:endParaRPr/>
-          </a:p>
-          <a:p>
-            <a:pPr indent="0" lvl="0" marL="0" rtl="0" algn="l">
-              <a:spcBef>
-                <a:spcPts val="0"/>
-              </a:spcBef>
-              <a:spcAft>
-                <a:spcPts val="0"/>
-              </a:spcAft>
-              <a:buNone/>
-            </a:pPr>
-            <a:r>
-              <a:t/>
-            </a:r>
-            <a:endParaRPr/>
-          </a:p>
-          <a:p>
-            <a:pPr indent="0" lvl="0" marL="0" rtl="0" algn="l">
-              <a:spcBef>
-                <a:spcPts val="0"/>
-              </a:spcBef>
-              <a:spcAft>
-                <a:spcPts val="0"/>
-              </a:spcAft>
-              <a:buNone/>
-            </a:pPr>
-            <a:r>
-              <a:rPr lang="en-US"/>
-              <a:t>No entran los seis guiones ni los ejemplos de calibración.</a:t>
-            </a:r>
-            <a:endParaRPr/>
-          </a:p>
-          <a:p>
-            <a:pPr indent="0" lvl="0" marL="0" rtl="0" algn="l">
-              <a:spcBef>
-                <a:spcPts val="0"/>
-              </a:spcBef>
-              <a:spcAft>
-                <a:spcPts val="0"/>
-              </a:spcAft>
-              <a:buNone/>
-            </a:pPr>
-            <a:r>
-              <a:t/>
-            </a:r>
-            <a:endParaRPr/>
-          </a:p>
-          <a:p>
-            <a:pPr indent="0" lvl="0" marL="0" rtl="0" algn="l">
-              <a:spcBef>
-                <a:spcPts val="0"/>
-              </a:spcBef>
-              <a:spcAft>
-                <a:spcPts val="0"/>
-              </a:spcAft>
-              <a:buNone/>
-            </a:pPr>
-            <a:r>
-              <a:rPr lang="en-US"/>
-              <a:t>Hace falta un presupuesto de lote distinto. El tope de una sesión no es el tope de la cuenta.</a:t>
+              <a:t>S11 · 13/15 · bloque 65–75 min. Lectura de métricas con resultados reales y de laboratorio. En el laboratorio pgvector (lab/eval/resultados-laboratorio.md): RAG básico 16/20 (10/14 respondibles, 6/6 rechazos, 1,00 búsquedas medias) frente a CRAG 17/20 (11/14 respondibles, 6/6 rechazos, 1,80 búsquedas medias). En el lote histórico cloud del 3 de octubre (tabla-resultados.md, etiquetado como histórico por cambio posterior de modelo y prompts): RAG 17/20 (11/14, 6/6, 0,95 búsquedas medias, 1,19 s) frente a CRAG 18/20 (13/14, 5/6, 1,55 búsquedas medias, 4,30 s).</a:t>
+            </a:r>
+            <a:endParaRPr/>
+          </a:p>
+          <a:p>
+            <a:pPr indent="0" lvl="0" marL="0" rtl="0" algn="l">
+              <a:spcBef>
+                <a:spcPts val="0"/>
+              </a:spcBef>
+              <a:spcAft>
+                <a:spcPts val="0"/>
+              </a:spcAft>
+              <a:buNone/>
+            </a:pPr>
+            <a:r>
+              <a:t/>
+            </a:r>
+            <a:endParaRPr/>
+          </a:p>
+          <a:p>
+            <a:pPr indent="0" lvl="0" marL="0" rtl="0" algn="l">
+              <a:spcBef>
+                <a:spcPts val="0"/>
+              </a:spcBef>
+              <a:spcAft>
+                <a:spcPts val="0"/>
+              </a:spcAft>
+              <a:buNone/>
+            </a:pPr>
+            <a:r>
+              <a:rPr lang="en-US"/>
+              <a:t/>
+            </a:r>
+            <a:endParaRPr/>
+          </a:p>
+          <a:p>
+            <a:pPr indent="0" lvl="0" marL="0" rtl="0" algn="l">
+              <a:spcBef>
+                <a:spcPts val="0"/>
+              </a:spcBef>
+              <a:spcAft>
+                <a:spcPts val="0"/>
+              </a:spcAft>
+              <a:buNone/>
+            </a:pPr>
+            <a:r>
+              <a:t/>
+            </a:r>
+            <a:endParaRPr/>
+          </a:p>
+          <a:p>
+            <a:pPr indent="0" lvl="0" marL="0" rtl="0" algn="l">
+              <a:spcBef>
+                <a:spcPts val="0"/>
+              </a:spcBef>
+              <a:spcAft>
+                <a:spcPts val="0"/>
+              </a:spcAft>
+              <a:buNone/>
+            </a:pPr>
+            <a:r>
+              <a:rPr lang="en-US"/>
+              <a:t/>
+            </a:r>
+            <a:endParaRPr/>
+          </a:p>
+          <a:p>
+            <a:pPr indent="0" lvl="0" marL="0" rtl="0" algn="l">
+              <a:spcBef>
+                <a:spcPts val="0"/>
+              </a:spcBef>
+              <a:spcAft>
+                <a:spcPts val="0"/>
+              </a:spcAft>
+              <a:buNone/>
+            </a:pPr>
+            <a:r>
+              <a:t/>
+            </a:r>
+            <a:endParaRPr/>
+          </a:p>
+          <a:p>
+            <a:pPr indent="0" lvl="0" marL="0" rtl="0" algn="l">
+              <a:spcBef>
+                <a:spcPts val="0"/>
+              </a:spcBef>
+              <a:spcAft>
+                <a:spcPts val="0"/>
+              </a:spcAft>
+              <a:buNone/>
+            </a:pPr>
+            <a:r>
+              <a:rPr lang="en-US"/>
+              <a:t/>
             </a:r>
             <a:endParaRPr/>
           </a:p>
@@ -4574,100 +4574,100 @@
             </a:pPr>
             <a:r>
               <a:rPr lang="en-US"/>
-              <a:t>Referencia de recuperación.</a:t>
-            </a:r>
-            <a:endParaRPr/>
-          </a:p>
-          <a:p>
-            <a:pPr indent="0" lvl="0" marL="0" rtl="0" algn="l">
-              <a:spcBef>
-                <a:spcPts val="0"/>
-              </a:spcBef>
-              <a:spcAft>
-                <a:spcPts val="0"/>
-              </a:spcAft>
-              <a:buNone/>
-            </a:pPr>
-            <a:r>
-              <a:t/>
-            </a:r>
-            <a:endParaRPr/>
-          </a:p>
-          <a:p>
-            <a:pPr indent="0" lvl="0" marL="0" rtl="0" algn="l">
-              <a:spcBef>
-                <a:spcPts val="0"/>
-              </a:spcBef>
-              <a:spcAft>
-                <a:spcPts val="0"/>
-              </a:spcAft>
-              <a:buNone/>
-            </a:pPr>
-            <a:r>
-              <a:rPr lang="en-US"/>
-              <a:t>Comprueba preflight: fuente efectiva y APP_MODE demo. Abre la URL que imprime bun run dev. Elige el guion. Si no responde, abre material/evidencias. No arranques activate --execute.</a:t>
-            </a:r>
-            <a:endParaRPr/>
-          </a:p>
-          <a:p>
-            <a:pPr indent="0" lvl="0" marL="0" rtl="0" algn="l">
-              <a:spcBef>
-                <a:spcPts val="0"/>
-              </a:spcBef>
-              <a:spcAft>
-                <a:spcPts val="0"/>
-              </a:spcAft>
-              <a:buNone/>
-            </a:pPr>
-            <a:r>
-              <a:t/>
-            </a:r>
-            <a:endParaRPr/>
-          </a:p>
-          <a:p>
-            <a:pPr indent="0" lvl="0" marL="0" rtl="0" algn="l">
-              <a:spcBef>
-                <a:spcPts val="0"/>
-              </a:spcBef>
-              <a:spcAft>
-                <a:spcPts val="0"/>
-              </a:spcAft>
-              <a:buNone/>
-            </a:pPr>
-            <a:r>
-              <a:rPr lang="en-US"/>
-              <a:t>No arranques el puente remoto ni activate --execute.</a:t>
-            </a:r>
-            <a:endParaRPr/>
-          </a:p>
-          <a:p>
-            <a:pPr indent="0" lvl="0" marL="0" rtl="0" algn="l">
-              <a:spcBef>
-                <a:spcPts val="0"/>
-              </a:spcBef>
-              <a:spcAft>
-                <a:spcPts val="0"/>
-              </a:spcAft>
-              <a:buNone/>
-            </a:pPr>
-            <a:r>
-              <a:t/>
-            </a:r>
-            <a:endParaRPr/>
-          </a:p>
-          <a:p>
-            <a:pPr indent="0" lvl="0" marL="0" rtl="0" algn="l">
-              <a:spcBef>
-                <a:spcPts val="0"/>
-              </a:spcBef>
-              <a:spcAft>
-                <a:spcPts val="0"/>
-              </a:spcAft>
-              <a:buNone/>
-            </a:pPr>
-            <a:r>
-              <a:rPr lang="en-US"/>
-              <a:t>Un acierto de guion se anuncia como guion, no como calidad.</a:t>
+              <a:t>S11 · 14/15 · referencia de respaldo. Si el servicio remoto o el presupuesto dan aviso, usa bun run lab:demo o el modo demo local anunciando claramente qué entorno se está proyectando.</a:t>
+            </a:r>
+            <a:endParaRPr/>
+          </a:p>
+          <a:p>
+            <a:pPr indent="0" lvl="0" marL="0" rtl="0" algn="l">
+              <a:spcBef>
+                <a:spcPts val="0"/>
+              </a:spcBef>
+              <a:spcAft>
+                <a:spcPts val="0"/>
+              </a:spcAft>
+              <a:buNone/>
+            </a:pPr>
+            <a:r>
+              <a:t/>
+            </a:r>
+            <a:endParaRPr/>
+          </a:p>
+          <a:p>
+            <a:pPr indent="0" lvl="0" marL="0" rtl="0" algn="l">
+              <a:spcBef>
+                <a:spcPts val="0"/>
+              </a:spcBef>
+              <a:spcAft>
+                <a:spcPts val="0"/>
+              </a:spcAft>
+              <a:buNone/>
+            </a:pPr>
+            <a:r>
+              <a:rPr lang="en-US"/>
+              <a:t/>
+            </a:r>
+            <a:endParaRPr/>
+          </a:p>
+          <a:p>
+            <a:pPr indent="0" lvl="0" marL="0" rtl="0" algn="l">
+              <a:spcBef>
+                <a:spcPts val="0"/>
+              </a:spcBef>
+              <a:spcAft>
+                <a:spcPts val="0"/>
+              </a:spcAft>
+              <a:buNone/>
+            </a:pPr>
+            <a:r>
+              <a:t/>
+            </a:r>
+            <a:endParaRPr/>
+          </a:p>
+          <a:p>
+            <a:pPr indent="0" lvl="0" marL="0" rtl="0" algn="l">
+              <a:spcBef>
+                <a:spcPts val="0"/>
+              </a:spcBef>
+              <a:spcAft>
+                <a:spcPts val="0"/>
+              </a:spcAft>
+              <a:buNone/>
+            </a:pPr>
+            <a:r>
+              <a:rPr lang="en-US"/>
+              <a:t/>
+            </a:r>
+            <a:endParaRPr/>
+          </a:p>
+          <a:p>
+            <a:pPr indent="0" lvl="0" marL="0" rtl="0" algn="l">
+              <a:spcBef>
+                <a:spcPts val="0"/>
+              </a:spcBef>
+              <a:spcAft>
+                <a:spcPts val="0"/>
+              </a:spcAft>
+              <a:buNone/>
+            </a:pPr>
+            <a:r>
+              <a:t/>
+            </a:r>
+            <a:endParaRPr/>
+          </a:p>
+          <a:p>
+            <a:pPr indent="0" lvl="0" marL="0" rtl="0" algn="l">
+              <a:spcBef>
+                <a:spcPts val="0"/>
+              </a:spcBef>
+              <a:spcAft>
+                <a:spcPts val="0"/>
+              </a:spcAft>
+              <a:buNone/>
+            </a:pPr>
+            <a:r>
+              <a:rPr lang="en-US"/>
+              <a:t/>
             </a:r>
             <a:endParaRPr/>
           </a:p>
@@ -5220,100 +5220,100 @@
             </a:pPr>
             <a:r>
               <a:rPr lang="en-US"/>
-              <a:t>S11 · 15/15 · cierre.</a:t>
-            </a:r>
-            <a:endParaRPr/>
-          </a:p>
-          <a:p>
-            <a:pPr indent="0" lvl="0" marL="0" rtl="0" algn="l">
-              <a:spcBef>
-                <a:spcPts val="0"/>
-              </a:spcBef>
-              <a:spcAft>
-                <a:spcPts val="0"/>
-              </a:spcAft>
-              <a:buNone/>
-            </a:pPr>
-            <a:r>
-              <a:t/>
-            </a:r>
-            <a:endParaRPr/>
-          </a:p>
-          <a:p>
-            <a:pPr indent="0" lvl="0" marL="0" rtl="0" algn="l">
-              <a:spcBef>
-                <a:spcPts val="0"/>
-              </a:spcBef>
-              <a:spcAft>
-                <a:spcPts val="0"/>
-              </a:spcAft>
-              <a:buNone/>
-            </a:pPr>
-            <a:r>
-              <a:rPr lang="en-US"/>
-              <a:t>Deja el QR visible. Evalúa S10, la clase del 22 de octubre.</a:t>
-            </a:r>
-            <a:endParaRPr/>
-          </a:p>
-          <a:p>
-            <a:pPr indent="0" lvl="0" marL="0" rtl="0" algn="l">
-              <a:spcBef>
-                <a:spcPts val="0"/>
-              </a:spcBef>
-              <a:spcAft>
-                <a:spcPts val="0"/>
-              </a:spcAft>
-              <a:buNone/>
-            </a:pPr>
-            <a:r>
-              <a:t/>
-            </a:r>
-            <a:endParaRPr/>
-          </a:p>
-          <a:p>
-            <a:pPr indent="0" lvl="0" marL="0" rtl="0" algn="l">
-              <a:spcBef>
-                <a:spcPts val="0"/>
-              </a:spcBef>
-              <a:spcAft>
-                <a:spcPts val="0"/>
-              </a:spcAft>
-              <a:buNone/>
-            </a:pPr>
-            <a:r>
-              <a:rPr lang="en-US"/>
-              <a:t>No envíes ninguna evaluación.</a:t>
-            </a:r>
-            <a:endParaRPr/>
-          </a:p>
-          <a:p>
-            <a:pPr indent="0" lvl="0" marL="0" rtl="0" algn="l">
-              <a:spcBef>
-                <a:spcPts val="0"/>
-              </a:spcBef>
-              <a:spcAft>
-                <a:spcPts val="0"/>
-              </a:spcAft>
-              <a:buNone/>
-            </a:pPr>
-            <a:r>
-              <a:t/>
-            </a:r>
-            <a:endParaRPr/>
-          </a:p>
-          <a:p>
-            <a:pPr indent="0" lvl="0" marL="0" rtl="0" algn="l">
-              <a:spcBef>
-                <a:spcPts val="0"/>
-              </a:spcBef>
-              <a:spcAft>
-                <a:spcPts val="0"/>
-              </a:spcAft>
-              <a:buNone/>
-            </a:pPr>
-            <a:r>
-              <a:rPr lang="en-US"/>
-              <a:t>La comparación reservada sigue sin ejecutarse.</a:t>
+              <a:t>S11 · 15/15 · cierre y preguntas (80–90 min). Deja el QR visible (evalúa nuestra S10 del 22 de octubre). Recuerda que la entrega de S11 incluye la tabla de comparación ejecutada con recuperaciones medias y revisión manual de fuentes.</a:t>
+            </a:r>
+            <a:endParaRPr/>
+          </a:p>
+          <a:p>
+            <a:pPr indent="0" lvl="0" marL="0" rtl="0" algn="l">
+              <a:spcBef>
+                <a:spcPts val="0"/>
+              </a:spcBef>
+              <a:spcAft>
+                <a:spcPts val="0"/>
+              </a:spcAft>
+              <a:buNone/>
+            </a:pPr>
+            <a:r>
+              <a:t/>
+            </a:r>
+            <a:endParaRPr/>
+          </a:p>
+          <a:p>
+            <a:pPr indent="0" lvl="0" marL="0" rtl="0" algn="l">
+              <a:spcBef>
+                <a:spcPts val="0"/>
+              </a:spcBef>
+              <a:spcAft>
+                <a:spcPts val="0"/>
+              </a:spcAft>
+              <a:buNone/>
+            </a:pPr>
+            <a:r>
+              <a:rPr lang="en-US"/>
+              <a:t/>
+            </a:r>
+            <a:endParaRPr/>
+          </a:p>
+          <a:p>
+            <a:pPr indent="0" lvl="0" marL="0" rtl="0" algn="l">
+              <a:spcBef>
+                <a:spcPts val="0"/>
+              </a:spcBef>
+              <a:spcAft>
+                <a:spcPts val="0"/>
+              </a:spcAft>
+              <a:buNone/>
+            </a:pPr>
+            <a:r>
+              <a:t/>
+            </a:r>
+            <a:endParaRPr/>
+          </a:p>
+          <a:p>
+            <a:pPr indent="0" lvl="0" marL="0" rtl="0" algn="l">
+              <a:spcBef>
+                <a:spcPts val="0"/>
+              </a:spcBef>
+              <a:spcAft>
+                <a:spcPts val="0"/>
+              </a:spcAft>
+              <a:buNone/>
+            </a:pPr>
+            <a:r>
+              <a:rPr lang="en-US"/>
+              <a:t/>
+            </a:r>
+            <a:endParaRPr/>
+          </a:p>
+          <a:p>
+            <a:pPr indent="0" lvl="0" marL="0" rtl="0" algn="l">
+              <a:spcBef>
+                <a:spcPts val="0"/>
+              </a:spcBef>
+              <a:spcAft>
+                <a:spcPts val="0"/>
+              </a:spcAft>
+              <a:buNone/>
+            </a:pPr>
+            <a:r>
+              <a:t/>
+            </a:r>
+            <a:endParaRPr/>
+          </a:p>
+          <a:p>
+            <a:pPr indent="0" lvl="0" marL="0" rtl="0" algn="l">
+              <a:spcBef>
+                <a:spcPts val="0"/>
+              </a:spcBef>
+              <a:spcAft>
+                <a:spcPts val="0"/>
+              </a:spcAft>
+              <a:buNone/>
+            </a:pPr>
+            <a:r>
+              <a:rPr lang="en-US"/>
+              <a:t/>
             </a:r>
             <a:endParaRPr/>
           </a:p>
@@ -5880,100 +5880,100 @@
             </a:pPr>
             <a:r>
               <a:rPr lang="en-US"/>
-              <a:t>S11 · 02/15 · bloque 0–10. QR.</a:t>
-            </a:r>
-            <a:endParaRPr/>
-          </a:p>
-          <a:p>
-            <a:pPr indent="0" lvl="0" marL="0" rtl="0" algn="l">
-              <a:spcBef>
-                <a:spcPts val="0"/>
-              </a:spcBef>
-              <a:spcAft>
-                <a:spcPts val="0"/>
-              </a:spcAft>
-              <a:buNone/>
-            </a:pPr>
-            <a:r>
-              <a:t/>
-            </a:r>
-            <a:endParaRPr/>
-          </a:p>
-          <a:p>
-            <a:pPr indent="0" lvl="0" marL="0" rtl="0" algn="l">
-              <a:spcBef>
-                <a:spcPts val="0"/>
-              </a:spcBef>
-              <a:spcAft>
-                <a:spcPts val="0"/>
-              </a:spcAft>
-              <a:buNone/>
-            </a:pPr>
-            <a:r>
-              <a:rPr lang="en-US"/>
-              <a:t>Este QR evalúa S10, nuestra clase del 22 de octubre. No es un formulario nuevo.</a:t>
-            </a:r>
-            <a:endParaRPr/>
-          </a:p>
-          <a:p>
-            <a:pPr indent="0" lvl="0" marL="0" rtl="0" algn="l">
-              <a:spcBef>
-                <a:spcPts val="0"/>
-              </a:spcBef>
-              <a:spcAft>
-                <a:spcPts val="0"/>
-              </a:spcAft>
-              <a:buNone/>
-            </a:pPr>
-            <a:r>
-              <a:t/>
-            </a:r>
-            <a:endParaRPr/>
-          </a:p>
-          <a:p>
-            <a:pPr indent="0" lvl="0" marL="0" rtl="0" algn="l">
-              <a:spcBef>
-                <a:spcPts val="0"/>
-              </a:spcBef>
-              <a:spcAft>
-                <a:spcPts val="0"/>
-              </a:spcAft>
-              <a:buNone/>
-            </a:pPr>
-            <a:r>
-              <a:rPr lang="en-US"/>
-              <a:t>Objetivos: orden aplicado, evidencia, límites, traza y el protocolo de comparación.</a:t>
-            </a:r>
-            <a:endParaRPr/>
-          </a:p>
-          <a:p>
-            <a:pPr indent="0" lvl="0" marL="0" rtl="0" algn="l">
-              <a:spcBef>
-                <a:spcPts val="0"/>
-              </a:spcBef>
-              <a:spcAft>
-                <a:spcPts val="0"/>
-              </a:spcAft>
-              <a:buNone/>
-            </a:pPr>
-            <a:r>
-              <a:t/>
-            </a:r>
-            <a:endParaRPr/>
-          </a:p>
-          <a:p>
-            <a:pPr indent="0" lvl="0" marL="0" rtl="0" algn="l">
-              <a:spcBef>
-                <a:spcPts val="0"/>
-              </a:spcBef>
-              <a:spcAft>
-                <a:spcPts val="0"/>
-              </a:spcAft>
-              <a:buNone/>
-            </a:pPr>
-            <a:r>
-              <a:rPr lang="en-US"/>
-              <a:t>Si no se lee, usa la misma imagen de material/assets/qr-ai-engineer.jpg.</a:t>
+              <a:t>S11 · 02/15 · bloque 0–10 min. El QR de AI Engineer evalúa nuestra clase S10 del 22 de octubre. Hoy veremos la diferencia entre relevancia individual y cobertura global, las decisiones del grafo CRAG y la lectura de métricas con resultados ejecutados.</a:t>
+            </a:r>
+            <a:endParaRPr/>
+          </a:p>
+          <a:p>
+            <a:pPr indent="0" lvl="0" marL="0" rtl="0" algn="l">
+              <a:spcBef>
+                <a:spcPts val="0"/>
+              </a:spcBef>
+              <a:spcAft>
+                <a:spcPts val="0"/>
+              </a:spcAft>
+              <a:buNone/>
+            </a:pPr>
+            <a:r>
+              <a:t/>
+            </a:r>
+            <a:endParaRPr/>
+          </a:p>
+          <a:p>
+            <a:pPr indent="0" lvl="0" marL="0" rtl="0" algn="l">
+              <a:spcBef>
+                <a:spcPts val="0"/>
+              </a:spcBef>
+              <a:spcAft>
+                <a:spcPts val="0"/>
+              </a:spcAft>
+              <a:buNone/>
+            </a:pPr>
+            <a:r>
+              <a:rPr lang="en-US"/>
+              <a:t/>
+            </a:r>
+            <a:endParaRPr/>
+          </a:p>
+          <a:p>
+            <a:pPr indent="0" lvl="0" marL="0" rtl="0" algn="l">
+              <a:spcBef>
+                <a:spcPts val="0"/>
+              </a:spcBef>
+              <a:spcAft>
+                <a:spcPts val="0"/>
+              </a:spcAft>
+              <a:buNone/>
+            </a:pPr>
+            <a:r>
+              <a:t/>
+            </a:r>
+            <a:endParaRPr/>
+          </a:p>
+          <a:p>
+            <a:pPr indent="0" lvl="0" marL="0" rtl="0" algn="l">
+              <a:spcBef>
+                <a:spcPts val="0"/>
+              </a:spcBef>
+              <a:spcAft>
+                <a:spcPts val="0"/>
+              </a:spcAft>
+              <a:buNone/>
+            </a:pPr>
+            <a:r>
+              <a:rPr lang="en-US"/>
+              <a:t/>
+            </a:r>
+            <a:endParaRPr/>
+          </a:p>
+          <a:p>
+            <a:pPr indent="0" lvl="0" marL="0" rtl="0" algn="l">
+              <a:spcBef>
+                <a:spcPts val="0"/>
+              </a:spcBef>
+              <a:spcAft>
+                <a:spcPts val="0"/>
+              </a:spcAft>
+              <a:buNone/>
+            </a:pPr>
+            <a:r>
+              <a:t/>
+            </a:r>
+            <a:endParaRPr/>
+          </a:p>
+          <a:p>
+            <a:pPr indent="0" lvl="0" marL="0" rtl="0" algn="l">
+              <a:spcBef>
+                <a:spcPts val="0"/>
+              </a:spcBef>
+              <a:spcAft>
+                <a:spcPts val="0"/>
+              </a:spcAft>
+              <a:buNone/>
+            </a:pPr>
+            <a:r>
+              <a:rPr lang="en-US"/>
+              <a:t/>
             </a:r>
             <a:endParaRPr/>
           </a:p>
@@ -6540,100 +6540,100 @@
             </a:pPr>
             <a:r>
               <a:rPr lang="en-US"/>
-              <a:t>S11 · 03/15 · el límite, todavía en 0–10.</a:t>
-            </a:r>
-            <a:endParaRPr/>
-          </a:p>
-          <a:p>
-            <a:pPr indent="0" lvl="0" marL="0" rtl="0" algn="l">
-              <a:spcBef>
-                <a:spcPts val="0"/>
-              </a:spcBef>
-              <a:spcAft>
-                <a:spcPts val="0"/>
-              </a:spcAft>
-              <a:buNone/>
-            </a:pPr>
-            <a:r>
-              <a:t/>
-            </a:r>
-            <a:endParaRPr/>
-          </a:p>
-          <a:p>
-            <a:pPr indent="0" lvl="0" marL="0" rtl="0" algn="l">
-              <a:spcBef>
-                <a:spcPts val="0"/>
-              </a:spcBef>
-              <a:spcAft>
-                <a:spcPts val="0"/>
-              </a:spcAft>
-              <a:buNone/>
-            </a:pPr>
-            <a:r>
-              <a:rPr lang="en-US"/>
-              <a:t>Ejemplo: una pregunta que pide LangGraph y observabilidad puede necesitar S5 y S6.</a:t>
-            </a:r>
-            <a:endParaRPr/>
-          </a:p>
-          <a:p>
-            <a:pPr indent="0" lvl="0" marL="0" rtl="0" algn="l">
-              <a:spcBef>
-                <a:spcPts val="0"/>
-              </a:spcBef>
-              <a:spcAft>
-                <a:spcPts val="0"/>
-              </a:spcAft>
-              <a:buNone/>
-            </a:pPr>
-            <a:r>
-              <a:t/>
-            </a:r>
-            <a:endParaRPr/>
-          </a:p>
-          <a:p>
-            <a:pPr indent="0" lvl="0" marL="0" rtl="0" algn="l">
-              <a:spcBef>
-                <a:spcPts val="0"/>
-              </a:spcBef>
-              <a:spcAft>
-                <a:spcPts val="0"/>
-              </a:spcAft>
-              <a:buNone/>
-            </a:pPr>
-            <a:r>
-              <a:rPr lang="en-US"/>
-              <a:t>RAG básico no reformula. CRAG puede hacerlo, con tope.</a:t>
-            </a:r>
-            <a:endParaRPr/>
-          </a:p>
-          <a:p>
-            <a:pPr indent="0" lvl="0" marL="0" rtl="0" algn="l">
-              <a:spcBef>
-                <a:spcPts val="0"/>
-              </a:spcBef>
-              <a:spcAft>
-                <a:spcPts val="0"/>
-              </a:spcAft>
-              <a:buNone/>
-            </a:pPr>
-            <a:r>
-              <a:t/>
-            </a:r>
-            <a:endParaRPr/>
-          </a:p>
-          <a:p>
-            <a:pPr indent="0" lvl="0" marL="0" rtl="0" algn="l">
-              <a:spcBef>
-                <a:spcPts val="0"/>
-              </a:spcBef>
-              <a:spcAft>
-                <a:spcPts val="0"/>
-              </a:spcAft>
-              <a:buNone/>
-            </a:pPr>
-            <a:r>
-              <a:rPr lang="en-US"/>
-              <a:t>Di explícitamente que un resultado mejor no está garantizado.</a:t>
+              <a:t>S11 · 03/15 · bloque 0–10 min. Límite del RAG básico: cuando una pregunta exige unir dos secciones o dos documentos (por ejemplo S5 de LangGraph y S6 de observabilidad, o mTLS y SEV-1 en AetherCloud), una sola búsqueda top-4 puede recuperar solo una mitad o meter ruido.</a:t>
+            </a:r>
+            <a:endParaRPr/>
+          </a:p>
+          <a:p>
+            <a:pPr indent="0" lvl="0" marL="0" rtl="0" algn="l">
+              <a:spcBef>
+                <a:spcPts val="0"/>
+              </a:spcBef>
+              <a:spcAft>
+                <a:spcPts val="0"/>
+              </a:spcAft>
+              <a:buNone/>
+            </a:pPr>
+            <a:r>
+              <a:t/>
+            </a:r>
+            <a:endParaRPr/>
+          </a:p>
+          <a:p>
+            <a:pPr indent="0" lvl="0" marL="0" rtl="0" algn="l">
+              <a:spcBef>
+                <a:spcPts val="0"/>
+              </a:spcBef>
+              <a:spcAft>
+                <a:spcPts val="0"/>
+              </a:spcAft>
+              <a:buNone/>
+            </a:pPr>
+            <a:r>
+              <a:rPr lang="en-US"/>
+              <a:t/>
+            </a:r>
+            <a:endParaRPr/>
+          </a:p>
+          <a:p>
+            <a:pPr indent="0" lvl="0" marL="0" rtl="0" algn="l">
+              <a:spcBef>
+                <a:spcPts val="0"/>
+              </a:spcBef>
+              <a:spcAft>
+                <a:spcPts val="0"/>
+              </a:spcAft>
+              <a:buNone/>
+            </a:pPr>
+            <a:r>
+              <a:t/>
+            </a:r>
+            <a:endParaRPr/>
+          </a:p>
+          <a:p>
+            <a:pPr indent="0" lvl="0" marL="0" rtl="0" algn="l">
+              <a:spcBef>
+                <a:spcPts val="0"/>
+              </a:spcBef>
+              <a:spcAft>
+                <a:spcPts val="0"/>
+              </a:spcAft>
+              <a:buNone/>
+            </a:pPr>
+            <a:r>
+              <a:rPr lang="en-US"/>
+              <a:t/>
+            </a:r>
+            <a:endParaRPr/>
+          </a:p>
+          <a:p>
+            <a:pPr indent="0" lvl="0" marL="0" rtl="0" algn="l">
+              <a:spcBef>
+                <a:spcPts val="0"/>
+              </a:spcBef>
+              <a:spcAft>
+                <a:spcPts val="0"/>
+              </a:spcAft>
+              <a:buNone/>
+            </a:pPr>
+            <a:r>
+              <a:t/>
+            </a:r>
+            <a:endParaRPr/>
+          </a:p>
+          <a:p>
+            <a:pPr indent="0" lvl="0" marL="0" rtl="0" algn="l">
+              <a:spcBef>
+                <a:spcPts val="0"/>
+              </a:spcBef>
+              <a:spcAft>
+                <a:spcPts val="0"/>
+              </a:spcAft>
+              <a:buNone/>
+            </a:pPr>
+            <a:r>
+              <a:rPr lang="en-US"/>
+              <a:t/>
             </a:r>
             <a:endParaRPr/>
           </a:p>
@@ -7200,100 +7200,100 @@
             </a:pPr>
             <a:r>
               <a:rPr lang="en-US"/>
-              <a:t>S11 · 06/15 · bloque 10–25. Ordenación.</a:t>
-            </a:r>
-            <a:endParaRPr/>
-          </a:p>
-          <a:p>
-            <a:pPr indent="0" lvl="0" marL="0" rtl="0" algn="l">
-              <a:spcBef>
-                <a:spcPts val="0"/>
-              </a:spcBef>
-              <a:spcAft>
-                <a:spcPts val="0"/>
-              </a:spcAft>
-              <a:buNone/>
-            </a:pPr>
-            <a:r>
-              <a:t/>
-            </a:r>
-            <a:endParaRPr/>
-          </a:p>
-          <a:p>
-            <a:pPr indent="0" lvl="0" marL="0" rtl="0" algn="l">
-              <a:spcBef>
-                <a:spcPts val="0"/>
-              </a:spcBef>
-              <a:spcAft>
-                <a:spcPts val="0"/>
-              </a:spcAft>
-              <a:buNone/>
-            </a:pPr>
-            <a:r>
-              <a:rPr lang="en-US"/>
-              <a:t>usefulIds es membresía. El orden del contexto sale del ranking validado.</a:t>
-            </a:r>
-            <a:endParaRPr/>
-          </a:p>
-          <a:p>
-            <a:pPr indent="0" lvl="0" marL="0" rtl="0" algn="l">
-              <a:spcBef>
-                <a:spcPts val="0"/>
-              </a:spcBef>
-              <a:spcAft>
-                <a:spcPts val="0"/>
-              </a:spcAft>
-              <a:buNone/>
-            </a:pPr>
-            <a:r>
-              <a:t/>
-            </a:r>
-            <a:endParaRPr/>
-          </a:p>
-          <a:p>
-            <a:pPr indent="0" lvl="0" marL="0" rtl="0" algn="l">
-              <a:spcBef>
-                <a:spcPts val="0"/>
-              </a:spcBef>
-              <a:spcAft>
-                <a:spcPts val="0"/>
-              </a:spcAft>
-              <a:buNone/>
-            </a:pPr>
-            <a:r>
-              <a:rPr lang="en-US"/>
-              <a:t>Un empate no se reordena al azar: gana la posición que ya devolvió el ranking.</a:t>
-            </a:r>
-            <a:endParaRPr/>
-          </a:p>
-          <a:p>
-            <a:pPr indent="0" lvl="0" marL="0" rtl="0" algn="l">
-              <a:spcBef>
-                <a:spcPts val="0"/>
-              </a:spcBef>
-              <a:spcAft>
-                <a:spcPts val="0"/>
-              </a:spcAft>
-              <a:buNone/>
-            </a:pPr>
-            <a:r>
-              <a:t/>
-            </a:r>
-            <a:endParaRPr/>
-          </a:p>
-          <a:p>
-            <a:pPr indent="0" lvl="0" marL="0" rtl="0" algn="l">
-              <a:spcBef>
-                <a:spcPts val="0"/>
-              </a:spcBef>
-              <a:spcAft>
-                <a:spcPts val="0"/>
-              </a:spcAft>
-              <a:buNone/>
-            </a:pPr>
-            <a:r>
-              <a:rPr lang="en-US"/>
-              <a:t>La puntuación que se ve no es una probabilidad.</a:t>
+              <a:t>S11 · 06/15 · bloque 10–25 min. Diferencia fundamental entre recuperar (retrieve, hasta 10 candidatos), reordenar (rank, asigna puntuación en la escala cerrada [0, 1]; opcionalmente con Qwen3-Reranker-0.6B y su prompt yes/no) y juzgar suficiencia (assess). Un fragmento puede tener score = 0,85 porque responde perfectamente a la primera mitad de la pregunta, pero la cobertura de toda la pregunta sigue siendo parcial.</a:t>
+            </a:r>
+            <a:endParaRPr/>
+          </a:p>
+          <a:p>
+            <a:pPr indent="0" lvl="0" marL="0" rtl="0" algn="l">
+              <a:spcBef>
+                <a:spcPts val="0"/>
+              </a:spcBef>
+              <a:spcAft>
+                <a:spcPts val="0"/>
+              </a:spcAft>
+              <a:buNone/>
+            </a:pPr>
+            <a:r>
+              <a:t/>
+            </a:r>
+            <a:endParaRPr/>
+          </a:p>
+          <a:p>
+            <a:pPr indent="0" lvl="0" marL="0" rtl="0" algn="l">
+              <a:spcBef>
+                <a:spcPts val="0"/>
+              </a:spcBef>
+              <a:spcAft>
+                <a:spcPts val="0"/>
+              </a:spcAft>
+              <a:buNone/>
+            </a:pPr>
+            <a:r>
+              <a:rPr lang="en-US"/>
+              <a:t/>
+            </a:r>
+            <a:endParaRPr/>
+          </a:p>
+          <a:p>
+            <a:pPr indent="0" lvl="0" marL="0" rtl="0" algn="l">
+              <a:spcBef>
+                <a:spcPts val="0"/>
+              </a:spcBef>
+              <a:spcAft>
+                <a:spcPts val="0"/>
+              </a:spcAft>
+              <a:buNone/>
+            </a:pPr>
+            <a:r>
+              <a:t/>
+            </a:r>
+            <a:endParaRPr/>
+          </a:p>
+          <a:p>
+            <a:pPr indent="0" lvl="0" marL="0" rtl="0" algn="l">
+              <a:spcBef>
+                <a:spcPts val="0"/>
+              </a:spcBef>
+              <a:spcAft>
+                <a:spcPts val="0"/>
+              </a:spcAft>
+              <a:buNone/>
+            </a:pPr>
+            <a:r>
+              <a:rPr lang="en-US"/>
+              <a:t/>
+            </a:r>
+            <a:endParaRPr/>
+          </a:p>
+          <a:p>
+            <a:pPr indent="0" lvl="0" marL="0" rtl="0" algn="l">
+              <a:spcBef>
+                <a:spcPts val="0"/>
+              </a:spcBef>
+              <a:spcAft>
+                <a:spcPts val="0"/>
+              </a:spcAft>
+              <a:buNone/>
+            </a:pPr>
+            <a:r>
+              <a:t/>
+            </a:r>
+            <a:endParaRPr/>
+          </a:p>
+          <a:p>
+            <a:pPr indent="0" lvl="0" marL="0" rtl="0" algn="l">
+              <a:spcBef>
+                <a:spcPts val="0"/>
+              </a:spcBef>
+              <a:spcAft>
+                <a:spcPts val="0"/>
+              </a:spcAft>
+              <a:buNone/>
+            </a:pPr>
+            <a:r>
+              <a:rPr lang="en-US"/>
+              <a:t/>
             </a:r>
             <a:endParaRPr/>
           </a:p>
@@ -7923,100 +7923,100 @@
             </a:pPr>
             <a:r>
               <a:rPr lang="en-US"/>
-              <a:t>S11 · 09/15 · descartar y reformular. Bloque 25–45.</a:t>
-            </a:r>
-            <a:endParaRPr/>
-          </a:p>
-          <a:p>
-            <a:pPr indent="0" lvl="0" marL="0" rtl="0" algn="l">
-              <a:spcBef>
-                <a:spcPts val="0"/>
-              </a:spcBef>
-              <a:spcAft>
-                <a:spcPts val="0"/>
-              </a:spcAft>
-              <a:buNone/>
-            </a:pPr>
-            <a:r>
-              <a:t/>
-            </a:r>
-            <a:endParaRPr/>
-          </a:p>
-          <a:p>
-            <a:pPr indent="0" lvl="0" marL="0" rtl="0" algn="l">
-              <a:spcBef>
-                <a:spcPts val="0"/>
-              </a:spcBef>
-              <a:spcAft>
-                <a:spcPts val="0"/>
-              </a:spcAft>
-              <a:buNone/>
-            </a:pPr>
-            <a:r>
-              <a:rPr lang="en-US"/>
-              <a:t>Guion: Primera evidencia descartada. Descarta S16 y cita solo S6.</a:t>
-            </a:r>
-            <a:endParaRPr/>
-          </a:p>
-          <a:p>
-            <a:pPr indent="0" lvl="0" marL="0" rtl="0" algn="l">
-              <a:spcBef>
-                <a:spcPts val="0"/>
-              </a:spcBef>
-              <a:spcAft>
-                <a:spcPts val="0"/>
-              </a:spcAft>
-              <a:buNone/>
-            </a:pPr>
-            <a:r>
-              <a:t/>
-            </a:r>
-            <a:endParaRPr/>
-          </a:p>
-          <a:p>
-            <a:pPr indent="0" lvl="0" marL="0" rtl="0" algn="l">
-              <a:spcBef>
-                <a:spcPts val="0"/>
-              </a:spcBef>
-              <a:spcAft>
-                <a:spcPts val="0"/>
-              </a:spcAft>
-              <a:buNone/>
-            </a:pPr>
-            <a:r>
-              <a:rPr lang="en-US"/>
-              <a:t>El mismo id puede aparecer en varios intentos. Cada fila conserva el intento.</a:t>
-            </a:r>
-            <a:endParaRPr/>
-          </a:p>
-          <a:p>
-            <a:pPr indent="0" lvl="0" marL="0" rtl="0" algn="l">
-              <a:spcBef>
-                <a:spcPts val="0"/>
-              </a:spcBef>
-              <a:spcAft>
-                <a:spcPts val="0"/>
-              </a:spcAft>
-              <a:buNone/>
-            </a:pPr>
-            <a:r>
-              <a:t/>
-            </a:r>
-            <a:endParaRPr/>
-          </a:p>
-          <a:p>
-            <a:pPr indent="0" lvl="0" marL="0" rtl="0" algn="l">
-              <a:spcBef>
-                <a:spcPts val="0"/>
-              </a:spcBef>
-              <a:spcAft>
-                <a:spcPts val="0"/>
-              </a:spcAft>
-              <a:buNone/>
-            </a:pPr>
-            <a:r>
-              <a:rPr lang="en-US"/>
-              <a:t>Una reformulación vacía o repetida termina en rechazo.</a:t>
+              <a:t>S11 · 09/15 · bloque 25–45 min. Ruta de evidencia insuficiente (discard -&gt; reformulate -&gt; retrieve). En el guion irrelevant-then-s6, la primera búsqueda trae S16 (score 0,20 &lt; 0,50 -&gt; insufficient). discard descarta S16 anotando el intento 1 y el motivo; la segunda búsqueda tras reformular recupera S6 (0,88) y responde sin citar jamás S16.</a:t>
+            </a:r>
+            <a:endParaRPr/>
+          </a:p>
+          <a:p>
+            <a:pPr indent="0" lvl="0" marL="0" rtl="0" algn="l">
+              <a:spcBef>
+                <a:spcPts val="0"/>
+              </a:spcBef>
+              <a:spcAft>
+                <a:spcPts val="0"/>
+              </a:spcAft>
+              <a:buNone/>
+            </a:pPr>
+            <a:r>
+              <a:t/>
+            </a:r>
+            <a:endParaRPr/>
+          </a:p>
+          <a:p>
+            <a:pPr indent="0" lvl="0" marL="0" rtl="0" algn="l">
+              <a:spcBef>
+                <a:spcPts val="0"/>
+              </a:spcBef>
+              <a:spcAft>
+                <a:spcPts val="0"/>
+              </a:spcAft>
+              <a:buNone/>
+            </a:pPr>
+            <a:r>
+              <a:rPr lang="en-US"/>
+              <a:t/>
+            </a:r>
+            <a:endParaRPr/>
+          </a:p>
+          <a:p>
+            <a:pPr indent="0" lvl="0" marL="0" rtl="0" algn="l">
+              <a:spcBef>
+                <a:spcPts val="0"/>
+              </a:spcBef>
+              <a:spcAft>
+                <a:spcPts val="0"/>
+              </a:spcAft>
+              <a:buNone/>
+            </a:pPr>
+            <a:r>
+              <a:t/>
+            </a:r>
+            <a:endParaRPr/>
+          </a:p>
+          <a:p>
+            <a:pPr indent="0" lvl="0" marL="0" rtl="0" algn="l">
+              <a:spcBef>
+                <a:spcPts val="0"/>
+              </a:spcBef>
+              <a:spcAft>
+                <a:spcPts val="0"/>
+              </a:spcAft>
+              <a:buNone/>
+            </a:pPr>
+            <a:r>
+              <a:rPr lang="en-US"/>
+              <a:t/>
+            </a:r>
+            <a:endParaRPr/>
+          </a:p>
+          <a:p>
+            <a:pPr indent="0" lvl="0" marL="0" rtl="0" algn="l">
+              <a:spcBef>
+                <a:spcPts val="0"/>
+              </a:spcBef>
+              <a:spcAft>
+                <a:spcPts val="0"/>
+              </a:spcAft>
+              <a:buNone/>
+            </a:pPr>
+            <a:r>
+              <a:t/>
+            </a:r>
+            <a:endParaRPr/>
+          </a:p>
+          <a:p>
+            <a:pPr indent="0" lvl="0" marL="0" rtl="0" algn="l">
+              <a:spcBef>
+                <a:spcPts val="0"/>
+              </a:spcBef>
+              <a:spcAft>
+                <a:spcPts val="0"/>
+              </a:spcAft>
+              <a:buNone/>
+            </a:pPr>
+            <a:r>
+              <a:rPr lang="en-US"/>
+              <a:t/>
             </a:r>
             <a:endParaRPr/>
           </a:p>
@@ -8709,131 +8709,131 @@
             </a:pPr>
             <a:r>
               <a:rPr lang="en-US"/>
-              <a:t>S11 · 07/15 · bloque 25–45. Rutas.</a:t>
-            </a:r>
-            <a:endParaRPr/>
-          </a:p>
-          <a:p>
-            <a:pPr indent="0" lvl="0" marL="0" rtl="0" algn="l">
-              <a:spcBef>
-                <a:spcPts val="0"/>
-              </a:spcBef>
-              <a:spcAft>
-                <a:spcPts val="0"/>
-              </a:spcAft>
-              <a:buNone/>
-            </a:pPr>
-            <a:r>
-              <a:t/>
-            </a:r>
-            <a:endParaRPr/>
-          </a:p>
-          <a:p>
-            <a:pPr indent="0" lvl="0" marL="0" rtl="0" algn="l">
-              <a:spcBef>
-                <a:spcPts val="0"/>
-              </a:spcBef>
-              <a:spcAft>
-                <a:spcPts val="0"/>
-              </a:spcAft>
-              <a:buNone/>
-            </a:pPr>
-            <a:r>
-              <a:rPr lang="en-US"/>
-              <a:t>Suficiente: hay texto útil y no quedan lagunas.</a:t>
-            </a:r>
-            <a:endParaRPr/>
-          </a:p>
-          <a:p>
-            <a:pPr indent="0" lvl="0" marL="0" rtl="0" algn="l">
-              <a:spcBef>
-                <a:spcPts val="0"/>
-              </a:spcBef>
-              <a:spcAft>
-                <a:spcPts val="0"/>
-              </a:spcAft>
-              <a:buNone/>
-            </a:pPr>
-            <a:r>
-              <a:t/>
-            </a:r>
-            <a:endParaRPr/>
-          </a:p>
-          <a:p>
-            <a:pPr indent="0" lvl="0" marL="0" rtl="0" algn="l">
-              <a:spcBef>
-                <a:spcPts val="0"/>
-              </a:spcBef>
-              <a:spcAft>
-                <a:spcPts val="0"/>
-              </a:spcAft>
-              <a:buNone/>
-            </a:pPr>
-            <a:r>
-              <a:rPr lang="en-US"/>
-              <a:t>Parcial: hay texto útil y una laguna. Insuficiente: no se usa ese contexto.</a:t>
-            </a:r>
-            <a:endParaRPr/>
-          </a:p>
-          <a:p>
-            <a:pPr indent="0" lvl="0" marL="0" rtl="0" algn="l">
-              <a:spcBef>
-                <a:spcPts val="0"/>
-              </a:spcBef>
-              <a:spcAft>
-                <a:spcPts val="0"/>
-              </a:spcAft>
-              <a:buNone/>
-            </a:pPr>
-            <a:r>
-              <a:t/>
-            </a:r>
-            <a:endParaRPr/>
-          </a:p>
-          <a:p>
-            <a:pPr indent="0" lvl="0" marL="0" rtl="0" algn="l">
-              <a:spcBef>
-                <a:spcPts val="0"/>
-              </a:spcBef>
-              <a:spcAft>
-                <a:spcPts val="0"/>
-              </a:spcAft>
-              <a:buNone/>
-            </a:pPr>
-            <a:r>
-              <a:rPr lang="en-US"/>
-              <a:t>Error de evaluador no se reintenta. Rechazo: no se llama al generador.</a:t>
-            </a:r>
-            <a:endParaRPr/>
-          </a:p>
-          <a:p>
-            <a:pPr indent="0" lvl="0" marL="0" rtl="0" algn="l">
-              <a:spcBef>
-                <a:spcPts val="0"/>
-              </a:spcBef>
-              <a:spcAft>
-                <a:spcPts val="0"/>
-              </a:spcAft>
-              <a:buNone/>
-            </a:pPr>
-            <a:r>
-              <a:t/>
-            </a:r>
-            <a:endParaRPr/>
-          </a:p>
-          <a:p>
-            <a:pPr indent="0" lvl="0" marL="0" rtl="0" algn="l">
-              <a:spcBef>
-                <a:spcPts val="0"/>
-              </a:spcBef>
-              <a:spcAft>
-                <a:spcPts val="0"/>
-              </a:spcAft>
-              <a:buNone/>
-            </a:pPr>
-            <a:r>
-              <a:rPr lang="en-US"/>
-              <a:t>Elige el guion en el desplegable. Mientras responde, el selector no cambia.</a:t>
+              <a:t>S11 · 07/15 · bloque 25–45 min. Escala [0, 1] y umbrales calibrados (CRAG_SCORE_THRESHOLDS en packages/rag/src/crag.ts y LAB_CRAG_CONFIG en lab/src/config.ts): corte individual minChunkRelevance = 0,50 para entrar en usefulIds; cobertura &lt; 0,40 -&gt; insufficient; 0,40 a 0,74 o con lagunas -&gt; partial; &gt;= 0,75 sin lagunas -&gt; sufficient.</a:t>
+            </a:r>
+            <a:endParaRPr/>
+          </a:p>
+          <a:p>
+            <a:pPr indent="0" lvl="0" marL="0" rtl="0" algn="l">
+              <a:spcBef>
+                <a:spcPts val="0"/>
+              </a:spcBef>
+              <a:spcAft>
+                <a:spcPts val="0"/>
+              </a:spcAft>
+              <a:buNone/>
+            </a:pPr>
+            <a:r>
+              <a:t/>
+            </a:r>
+            <a:endParaRPr/>
+          </a:p>
+          <a:p>
+            <a:pPr indent="0" lvl="0" marL="0" rtl="0" algn="l">
+              <a:spcBef>
+                <a:spcPts val="0"/>
+              </a:spcBef>
+              <a:spcAft>
+                <a:spcPts val="0"/>
+              </a:spcAft>
+              <a:buNone/>
+            </a:pPr>
+            <a:r>
+              <a:rPr lang="en-US"/>
+              <a:t/>
+            </a:r>
+            <a:endParaRPr/>
+          </a:p>
+          <a:p>
+            <a:pPr indent="0" lvl="0" marL="0" rtl="0" algn="l">
+              <a:spcBef>
+                <a:spcPts val="0"/>
+              </a:spcBef>
+              <a:spcAft>
+                <a:spcPts val="0"/>
+              </a:spcAft>
+              <a:buNone/>
+            </a:pPr>
+            <a:r>
+              <a:t/>
+            </a:r>
+            <a:endParaRPr/>
+          </a:p>
+          <a:p>
+            <a:pPr indent="0" lvl="0" marL="0" rtl="0" algn="l">
+              <a:spcBef>
+                <a:spcPts val="0"/>
+              </a:spcBef>
+              <a:spcAft>
+                <a:spcPts val="0"/>
+              </a:spcAft>
+              <a:buNone/>
+            </a:pPr>
+            <a:r>
+              <a:rPr lang="en-US"/>
+              <a:t/>
+            </a:r>
+            <a:endParaRPr/>
+          </a:p>
+          <a:p>
+            <a:pPr indent="0" lvl="0" marL="0" rtl="0" algn="l">
+              <a:spcBef>
+                <a:spcPts val="0"/>
+              </a:spcBef>
+              <a:spcAft>
+                <a:spcPts val="0"/>
+              </a:spcAft>
+              <a:buNone/>
+            </a:pPr>
+            <a:r>
+              <a:t/>
+            </a:r>
+            <a:endParaRPr/>
+          </a:p>
+          <a:p>
+            <a:pPr indent="0" lvl="0" marL="0" rtl="0" algn="l">
+              <a:spcBef>
+                <a:spcPts val="0"/>
+              </a:spcBef>
+              <a:spcAft>
+                <a:spcPts val="0"/>
+              </a:spcAft>
+              <a:buNone/>
+            </a:pPr>
+            <a:r>
+              <a:rPr lang="en-US"/>
+              <a:t/>
+            </a:r>
+            <a:endParaRPr/>
+          </a:p>
+          <a:p>
+            <a:pPr indent="0" lvl="0" marL="0" rtl="0" algn="l">
+              <a:spcBef>
+                <a:spcPts val="0"/>
+              </a:spcBef>
+              <a:spcAft>
+                <a:spcPts val="0"/>
+              </a:spcAft>
+              <a:buNone/>
+            </a:pPr>
+            <a:r>
+              <a:t/>
+            </a:r>
+            <a:endParaRPr/>
+          </a:p>
+          <a:p>
+            <a:pPr indent="0" lvl="0" marL="0" rtl="0" algn="l">
+              <a:spcBef>
+                <a:spcPts val="0"/>
+              </a:spcBef>
+              <a:spcAft>
+                <a:spcPts val="0"/>
+              </a:spcAft>
+              <a:buNone/>
+            </a:pPr>
+            <a:r>
+              <a:rPr lang="en-US"/>
+              <a:t/>
             </a:r>
             <a:endParaRPr/>
           </a:p>
@@ -9902,100 +9902,100 @@
             </a:pPr>
             <a:r>
               <a:rPr lang="en-US"/>
-              <a:t>S11 · 04/15 · bloque 10–25. Comparación de diseño.</a:t>
-            </a:r>
-            <a:endParaRPr/>
-          </a:p>
-          <a:p>
-            <a:pPr indent="0" lvl="0" marL="0" rtl="0" algn="l">
-              <a:spcBef>
-                <a:spcPts val="0"/>
-              </a:spcBef>
-              <a:spcAft>
-                <a:spcPts val="0"/>
-              </a:spcAft>
-              <a:buNone/>
-            </a:pPr>
-            <a:r>
-              <a:t/>
-            </a:r>
-            <a:endParaRPr/>
-          </a:p>
-          <a:p>
-            <a:pPr indent="0" lvl="0" marL="0" rtl="0" algn="l">
-              <a:spcBef>
-                <a:spcPts val="0"/>
-              </a:spcBef>
-              <a:spcAft>
-                <a:spcPts val="0"/>
-              </a:spcAft>
-              <a:buNone/>
-            </a:pPr>
-            <a:r>
-              <a:rPr lang="en-US"/>
-              <a:t>Autores del artículo: Shi-Qi Yan, Jia-Chen Gu, Yun Zhu y Zhen-Hua Ling, arXiv:2401.15884.</a:t>
-            </a:r>
-            <a:endParaRPr/>
-          </a:p>
-          <a:p>
-            <a:pPr indent="0" lvl="0" marL="0" rtl="0" algn="l">
-              <a:spcBef>
-                <a:spcPts val="0"/>
-              </a:spcBef>
-              <a:spcAft>
-                <a:spcPts val="0"/>
-              </a:spcAft>
-              <a:buNone/>
-            </a:pPr>
-            <a:r>
-              <a:t/>
-            </a:r>
-            <a:endParaRPr/>
-          </a:p>
-          <a:p>
-            <a:pPr indent="0" lvl="0" marL="0" rtl="0" algn="l">
-              <a:spcBef>
-                <a:spcPts val="0"/>
-              </a:spcBef>
-              <a:spcAft>
-                <a:spcPts val="0"/>
-              </a:spcAft>
-              <a:buNone/>
-            </a:pPr>
-            <a:r>
-              <a:rPr lang="en-US"/>
-              <a:t>Esta app no busca en internet, no tiene un evaluador remoto verificado y un guion no demuestra una mejora.</a:t>
-            </a:r>
-            <a:endParaRPr/>
-          </a:p>
-          <a:p>
-            <a:pPr indent="0" lvl="0" marL="0" rtl="0" algn="l">
-              <a:spcBef>
-                <a:spcPts val="0"/>
-              </a:spcBef>
-              <a:spcAft>
-                <a:spcPts val="0"/>
-              </a:spcAft>
-              <a:buNone/>
-            </a:pPr>
-            <a:r>
-              <a:t/>
-            </a:r>
-            <a:endParaRPr/>
-          </a:p>
-          <a:p>
-            <a:pPr indent="0" lvl="0" marL="0" rtl="0" algn="l">
-              <a:spcBef>
-                <a:spcPts val="0"/>
-              </a:spcBef>
-              <a:spcAft>
-                <a:spcPts val="0"/>
-              </a:spcAft>
-              <a:buNone/>
-            </a:pPr>
-            <a:r>
-              <a:rPr lang="en-US"/>
-              <a:t>Señala latencia y coste: evaluar y reescribir también son llamadas cuando el perfil es real.</a:t>
+              <a:t>S11 · 11/15 · bloque 45–65 min. Lectura de la traza en vivo: muestra los pasos separados retrieve, rank y assess, las consultas ejecutadas, los fragmentos conservados con su puntuación en [0, 1] y los descartados con su intento.</a:t>
+            </a:r>
+            <a:endParaRPr/>
+          </a:p>
+          <a:p>
+            <a:pPr indent="0" lvl="0" marL="0" rtl="0" algn="l">
+              <a:spcBef>
+                <a:spcPts val="0"/>
+              </a:spcBef>
+              <a:spcAft>
+                <a:spcPts val="0"/>
+              </a:spcAft>
+              <a:buNone/>
+            </a:pPr>
+            <a:r>
+              <a:t/>
+            </a:r>
+            <a:endParaRPr/>
+          </a:p>
+          <a:p>
+            <a:pPr indent="0" lvl="0" marL="0" rtl="0" algn="l">
+              <a:spcBef>
+                <a:spcPts val="0"/>
+              </a:spcBef>
+              <a:spcAft>
+                <a:spcPts val="0"/>
+              </a:spcAft>
+              <a:buNone/>
+            </a:pPr>
+            <a:r>
+              <a:rPr lang="en-US"/>
+              <a:t/>
+            </a:r>
+            <a:endParaRPr/>
+          </a:p>
+          <a:p>
+            <a:pPr indent="0" lvl="0" marL="0" rtl="0" algn="l">
+              <a:spcBef>
+                <a:spcPts val="0"/>
+              </a:spcBef>
+              <a:spcAft>
+                <a:spcPts val="0"/>
+              </a:spcAft>
+              <a:buNone/>
+            </a:pPr>
+            <a:r>
+              <a:t/>
+            </a:r>
+            <a:endParaRPr/>
+          </a:p>
+          <a:p>
+            <a:pPr indent="0" lvl="0" marL="0" rtl="0" algn="l">
+              <a:spcBef>
+                <a:spcPts val="0"/>
+              </a:spcBef>
+              <a:spcAft>
+                <a:spcPts val="0"/>
+              </a:spcAft>
+              <a:buNone/>
+            </a:pPr>
+            <a:r>
+              <a:rPr lang="en-US"/>
+              <a:t/>
+            </a:r>
+            <a:endParaRPr/>
+          </a:p>
+          <a:p>
+            <a:pPr indent="0" lvl="0" marL="0" rtl="0" algn="l">
+              <a:spcBef>
+                <a:spcPts val="0"/>
+              </a:spcBef>
+              <a:spcAft>
+                <a:spcPts val="0"/>
+              </a:spcAft>
+              <a:buNone/>
+            </a:pPr>
+            <a:r>
+              <a:t/>
+            </a:r>
+            <a:endParaRPr/>
+          </a:p>
+          <a:p>
+            <a:pPr indent="0" lvl="0" marL="0" rtl="0" algn="l">
+              <a:spcBef>
+                <a:spcPts val="0"/>
+              </a:spcBef>
+              <a:spcAft>
+                <a:spcPts val="0"/>
+              </a:spcAft>
+              <a:buNone/>
+            </a:pPr>
+            <a:r>
+              <a:rPr lang="en-US"/>
+              <a:t/>
             </a:r>
             <a:endParaRPr/>
           </a:p>
@@ -11095,131 +11095,131 @@
             </a:pPr>
             <a:r>
               <a:rPr lang="en-US"/>
-              <a:t>S11 · 05/15 · estado del grafo.</a:t>
-            </a:r>
-            <a:endParaRPr/>
-          </a:p>
-          <a:p>
-            <a:pPr indent="0" lvl="0" marL="0" rtl="0" algn="l">
-              <a:spcBef>
-                <a:spcPts val="0"/>
-              </a:spcBef>
-              <a:spcAft>
-                <a:spcPts val="0"/>
-              </a:spcAft>
-              <a:buNone/>
-            </a:pPr>
-            <a:r>
-              <a:t/>
-            </a:r>
-            <a:endParaRPr/>
-          </a:p>
-          <a:p>
-            <a:pPr indent="0" lvl="0" marL="0" rtl="0" algn="l">
-              <a:spcBef>
-                <a:spcPts val="0"/>
-              </a:spcBef>
-              <a:spcAft>
-                <a:spcPts val="0"/>
-              </a:spcAft>
-              <a:buNone/>
-            </a:pPr>
-            <a:r>
-              <a:rPr lang="en-US"/>
-              <a:t>Abre docs/crag-graph.md si hace falta el esquema.</a:t>
-            </a:r>
-            <a:endParaRPr/>
-          </a:p>
-          <a:p>
-            <a:pPr indent="0" lvl="0" marL="0" rtl="0" algn="l">
-              <a:spcBef>
-                <a:spcPts val="0"/>
-              </a:spcBef>
-              <a:spcAft>
-                <a:spcPts val="0"/>
-              </a:spcAft>
-              <a:buNone/>
-            </a:pPr>
-            <a:r>
-              <a:t/>
-            </a:r>
-            <a:endParaRPr/>
-          </a:p>
-          <a:p>
-            <a:pPr indent="0" lvl="0" marL="0" rtl="0" algn="l">
-              <a:spcBef>
-                <a:spcPts val="0"/>
-              </a:spcBef>
-              <a:spcAft>
-                <a:spcPts val="0"/>
-              </a:spcAft>
-              <a:buNone/>
-            </a:pPr>
-            <a:r>
-              <a:rPr lang="en-US"/>
-              <a:t>originalQuestion permanece. currentQuery puede cambiar.</a:t>
-            </a:r>
-            <a:endParaRPr/>
-          </a:p>
-          <a:p>
-            <a:pPr indent="0" lvl="0" marL="0" rtl="0" algn="l">
-              <a:spcBef>
-                <a:spcPts val="0"/>
-              </a:spcBef>
-              <a:spcAft>
-                <a:spcPts val="0"/>
-              </a:spcAft>
-              <a:buNone/>
-            </a:pPr>
-            <a:r>
-              <a:t/>
-            </a:r>
-            <a:endParaRPr/>
-          </a:p>
-          <a:p>
-            <a:pPr indent="0" lvl="0" marL="0" rtl="0" algn="l">
-              <a:spcBef>
-                <a:spcPts val="0"/>
-              </a:spcBef>
-              <a:spcAft>
-                <a:spcPts val="0"/>
-              </a:spcAft>
-              <a:buNone/>
-            </a:pPr>
-            <a:r>
-              <a:rPr lang="en-US"/>
-              <a:t>No hay checkpointer ni contadores entre conversaciones.</a:t>
-            </a:r>
-            <a:endParaRPr/>
-          </a:p>
-          <a:p>
-            <a:pPr indent="0" lvl="0" marL="0" rtl="0" algn="l">
-              <a:spcBef>
-                <a:spcPts val="0"/>
-              </a:spcBef>
-              <a:spcAft>
-                <a:spcPts val="0"/>
-              </a:spcAft>
-              <a:buNone/>
-            </a:pPr>
-            <a:r>
-              <a:t/>
-            </a:r>
-            <a:endParaRPr/>
-          </a:p>
-          <a:p>
-            <a:pPr indent="0" lvl="0" marL="0" rtl="0" algn="l">
-              <a:spcBef>
-                <a:spcPts val="0"/>
-              </a:spcBef>
-              <a:spcAft>
-                <a:spcPts val="0"/>
-              </a:spcAft>
-              <a:buNone/>
-            </a:pPr>
-            <a:r>
-              <a:rPr lang="en-US"/>
-              <a:t>Puente de sintaxis: el estado es un objeto. En Python sería un TypedDict. No hay segunda implementación.</a:t>
+              <a:t>S11 · 04/15 · bloque 10–25 min. Comparación arquitectónica entre RAG básico y nuestra adaptación de CRAG (inspirada en Yan et al., arXiv:2401.15884). En producción y en el laboratorio el grafo separa rank (reordenamiento) y assess (valoración de suficiencia).</a:t>
+            </a:r>
+            <a:endParaRPr/>
+          </a:p>
+          <a:p>
+            <a:pPr indent="0" lvl="0" marL="0" rtl="0" algn="l">
+              <a:spcBef>
+                <a:spcPts val="0"/>
+              </a:spcBef>
+              <a:spcAft>
+                <a:spcPts val="0"/>
+              </a:spcAft>
+              <a:buNone/>
+            </a:pPr>
+            <a:r>
+              <a:t/>
+            </a:r>
+            <a:endParaRPr/>
+          </a:p>
+          <a:p>
+            <a:pPr indent="0" lvl="0" marL="0" rtl="0" algn="l">
+              <a:spcBef>
+                <a:spcPts val="0"/>
+              </a:spcBef>
+              <a:spcAft>
+                <a:spcPts val="0"/>
+              </a:spcAft>
+              <a:buNone/>
+            </a:pPr>
+            <a:r>
+              <a:rPr lang="en-US"/>
+              <a:t/>
+            </a:r>
+            <a:endParaRPr/>
+          </a:p>
+          <a:p>
+            <a:pPr indent="0" lvl="0" marL="0" rtl="0" algn="l">
+              <a:spcBef>
+                <a:spcPts val="0"/>
+              </a:spcBef>
+              <a:spcAft>
+                <a:spcPts val="0"/>
+              </a:spcAft>
+              <a:buNone/>
+            </a:pPr>
+            <a:r>
+              <a:t/>
+            </a:r>
+            <a:endParaRPr/>
+          </a:p>
+          <a:p>
+            <a:pPr indent="0" lvl="0" marL="0" rtl="0" algn="l">
+              <a:spcBef>
+                <a:spcPts val="0"/>
+              </a:spcBef>
+              <a:spcAft>
+                <a:spcPts val="0"/>
+              </a:spcAft>
+              <a:buNone/>
+            </a:pPr>
+            <a:r>
+              <a:rPr lang="en-US"/>
+              <a:t/>
+            </a:r>
+            <a:endParaRPr/>
+          </a:p>
+          <a:p>
+            <a:pPr indent="0" lvl="0" marL="0" rtl="0" algn="l">
+              <a:spcBef>
+                <a:spcPts val="0"/>
+              </a:spcBef>
+              <a:spcAft>
+                <a:spcPts val="0"/>
+              </a:spcAft>
+              <a:buNone/>
+            </a:pPr>
+            <a:r>
+              <a:t/>
+            </a:r>
+            <a:endParaRPr/>
+          </a:p>
+          <a:p>
+            <a:pPr indent="0" lvl="0" marL="0" rtl="0" algn="l">
+              <a:spcBef>
+                <a:spcPts val="0"/>
+              </a:spcBef>
+              <a:spcAft>
+                <a:spcPts val="0"/>
+              </a:spcAft>
+              <a:buNone/>
+            </a:pPr>
+            <a:r>
+              <a:rPr lang="en-US"/>
+              <a:t/>
+            </a:r>
+            <a:endParaRPr/>
+          </a:p>
+          <a:p>
+            <a:pPr indent="0" lvl="0" marL="0" rtl="0" algn="l">
+              <a:spcBef>
+                <a:spcPts val="0"/>
+              </a:spcBef>
+              <a:spcAft>
+                <a:spcPts val="0"/>
+              </a:spcAft>
+              <a:buNone/>
+            </a:pPr>
+            <a:r>
+              <a:t/>
+            </a:r>
+            <a:endParaRPr/>
+          </a:p>
+          <a:p>
+            <a:pPr indent="0" lvl="0" marL="0" rtl="0" algn="l">
+              <a:spcBef>
+                <a:spcPts val="0"/>
+              </a:spcBef>
+              <a:spcAft>
+                <a:spcPts val="0"/>
+              </a:spcAft>
+              <a:buNone/>
+            </a:pPr>
+            <a:r>
+              <a:rPr lang="en-US"/>
+              <a:t/>
             </a:r>
             <a:endParaRPr/>
           </a:p>
@@ -12291,116 +12291,116 @@
             </a:pPr>
             <a:r>
               <a:rPr lang="en-US"/>
-              <a:t>S11 · 11/15 · traza visible.</a:t>
-            </a:r>
-            <a:endParaRPr/>
-          </a:p>
-          <a:p>
-            <a:pPr indent="0" lvl="0" marL="0" rtl="0" algn="l">
-              <a:spcBef>
-                <a:spcPts val="0"/>
-              </a:spcBef>
-              <a:spcAft>
-                <a:spcPts val="0"/>
-              </a:spcAft>
-              <a:buNone/>
-            </a:pPr>
-            <a:r>
-              <a:t/>
-            </a:r>
-            <a:endParaRPr/>
-          </a:p>
-          <a:p>
-            <a:pPr indent="0" lvl="0" marL="0" rtl="0" algn="l">
-              <a:spcBef>
-                <a:spcPts val="0"/>
-              </a:spcBef>
-              <a:spcAft>
-                <a:spcPts val="0"/>
-              </a:spcAft>
-              <a:buNone/>
-            </a:pPr>
-            <a:r>
-              <a:rPr lang="en-US"/>
-              <a:t>Panel: Guion de prueba, terminal, motivo, búsquedas, reformulaciones, consulta original y consulta de búsqueda.</a:t>
-            </a:r>
-            <a:endParaRPr/>
-          </a:p>
-          <a:p>
-            <a:pPr indent="0" lvl="0" marL="0" rtl="0" algn="l">
-              <a:spcBef>
-                <a:spcPts val="0"/>
-              </a:spcBef>
-              <a:spcAft>
-                <a:spcPts val="0"/>
-              </a:spcAft>
-              <a:buNone/>
-            </a:pPr>
-            <a:r>
-              <a:t/>
-            </a:r>
-            <a:endParaRPr/>
-          </a:p>
-          <a:p>
-            <a:pPr indent="0" lvl="0" marL="0" rtl="0" algn="l">
-              <a:spcBef>
-                <a:spcPts val="0"/>
-              </a:spcBef>
-              <a:spcAft>
-                <a:spcPts val="0"/>
-              </a:spcAft>
-              <a:buNone/>
-            </a:pPr>
-            <a:r>
-              <a:rPr lang="en-US"/>
-              <a:t>Los seis guiones están en corpus/fixtures/crag-development-cases.json.</a:t>
-            </a:r>
-            <a:endParaRPr/>
-          </a:p>
-          <a:p>
-            <a:pPr indent="0" lvl="0" marL="0" rtl="0" algn="l">
-              <a:spcBef>
-                <a:spcPts val="0"/>
-              </a:spcBef>
-              <a:spcAft>
-                <a:spcPts val="0"/>
-              </a:spcAft>
-              <a:buNone/>
-            </a:pPr>
-            <a:r>
-              <a:t/>
-            </a:r>
-            <a:endParaRPr/>
-          </a:p>
-          <a:p>
-            <a:pPr indent="0" lvl="0" marL="0" rtl="0" algn="l">
-              <a:spcBef>
-                <a:spcPts val="0"/>
-              </a:spcBef>
-              <a:spcAft>
-                <a:spcPts val="0"/>
-              </a:spcAft>
-              <a:buNone/>
-            </a:pPr>
-            <a:r>
-              <a:rPr lang="en-US"/>
-              <a:t>Libre usa el índice lexical y un evaluador de reglas. Tampoco mide calidad.</a:t>
-            </a:r>
-            <a:endParaRPr/>
-          </a:p>
-          <a:p>
-            <a:pPr indent="0" lvl="0" marL="0" rtl="0" algn="l">
-              <a:spcBef>
-                <a:spcPts val="0"/>
-              </a:spcBef>
-              <a:spcAft>
-                <a:spcPts val="0"/>
-              </a:spcAft>
-              <a:buNone/>
-            </a:pPr>
-            <a:r>
-              <a:rPr lang="en-US"/>
-              <a:t>Si falla, abre la captura etiquetada y vuelve a esta diapositiva.</a:t>
+              <a:t>S11 · 05/15 · bloque 10–25 min. Estado del grafo en apps/api/src/crag-graph.ts y lab/src/crag-graph.ts. originalQuestion nunca se sobrescribe cuando currentQuery se reformula. Cada turno nace limpio sin arrastrar contadores de preguntas anteriores.</a:t>
+            </a:r>
+            <a:endParaRPr/>
+          </a:p>
+          <a:p>
+            <a:pPr indent="0" lvl="0" marL="0" rtl="0" algn="l">
+              <a:spcBef>
+                <a:spcPts val="0"/>
+              </a:spcBef>
+              <a:spcAft>
+                <a:spcPts val="0"/>
+              </a:spcAft>
+              <a:buNone/>
+            </a:pPr>
+            <a:r>
+              <a:t/>
+            </a:r>
+            <a:endParaRPr/>
+          </a:p>
+          <a:p>
+            <a:pPr indent="0" lvl="0" marL="0" rtl="0" algn="l">
+              <a:spcBef>
+                <a:spcPts val="0"/>
+              </a:spcBef>
+              <a:spcAft>
+                <a:spcPts val="0"/>
+              </a:spcAft>
+              <a:buNone/>
+            </a:pPr>
+            <a:r>
+              <a:rPr lang="en-US"/>
+              <a:t/>
+            </a:r>
+            <a:endParaRPr/>
+          </a:p>
+          <a:p>
+            <a:pPr indent="0" lvl="0" marL="0" rtl="0" algn="l">
+              <a:spcBef>
+                <a:spcPts val="0"/>
+              </a:spcBef>
+              <a:spcAft>
+                <a:spcPts val="0"/>
+              </a:spcAft>
+              <a:buNone/>
+            </a:pPr>
+            <a:r>
+              <a:t/>
+            </a:r>
+            <a:endParaRPr/>
+          </a:p>
+          <a:p>
+            <a:pPr indent="0" lvl="0" marL="0" rtl="0" algn="l">
+              <a:spcBef>
+                <a:spcPts val="0"/>
+              </a:spcBef>
+              <a:spcAft>
+                <a:spcPts val="0"/>
+              </a:spcAft>
+              <a:buNone/>
+            </a:pPr>
+            <a:r>
+              <a:rPr lang="en-US"/>
+              <a:t/>
+            </a:r>
+            <a:endParaRPr/>
+          </a:p>
+          <a:p>
+            <a:pPr indent="0" lvl="0" marL="0" rtl="0" algn="l">
+              <a:spcBef>
+                <a:spcPts val="0"/>
+              </a:spcBef>
+              <a:spcAft>
+                <a:spcPts val="0"/>
+              </a:spcAft>
+              <a:buNone/>
+            </a:pPr>
+            <a:r>
+              <a:t/>
+            </a:r>
+            <a:endParaRPr/>
+          </a:p>
+          <a:p>
+            <a:pPr indent="0" lvl="0" marL="0" rtl="0" algn="l">
+              <a:spcBef>
+                <a:spcPts val="0"/>
+              </a:spcBef>
+              <a:spcAft>
+                <a:spcPts val="0"/>
+              </a:spcAft>
+              <a:buNone/>
+            </a:pPr>
+            <a:r>
+              <a:rPr lang="en-US"/>
+              <a:t/>
+            </a:r>
+            <a:endParaRPr/>
+          </a:p>
+          <a:p>
+            <a:pPr indent="0" lvl="0" marL="0" rtl="0" algn="l">
+              <a:spcBef>
+                <a:spcPts val="0"/>
+              </a:spcBef>
+              <a:spcAft>
+                <a:spcPts val="0"/>
+              </a:spcAft>
+              <a:buNone/>
+            </a:pPr>
+            <a:r>
+              <a:rPr lang="en-US"/>
+              <a:t/>
             </a:r>
             <a:endParaRPr/>
           </a:p>
@@ -22952,7 +22952,7 @@
                 <a:cs typeface="Inter"/>
                 <a:sym typeface="Inter"/>
               </a:rPr>
-              <a:t>Corregir la búsqueda, no cambiar de producto.</a:t>
+              <a:t>Recuperar hasta 10, reordenar en [0, 1] y valorar suficiencia.</a:t>
             </a:r>
             <a:endParaRPr sz="1800">
               <a:solidFill>
@@ -22987,7 +22987,7 @@
                 <a:cs typeface="Inter"/>
                 <a:sym typeface="Inter"/>
               </a:rPr>
-              <a:t>La aplicación de S10 sigue siendo la base.</a:t>
+              <a:t>La etapa de RAG básico se conserva como línea base.</a:t>
             </a:r>
             <a:endParaRPr sz="1800">
               <a:solidFill>
@@ -23287,7 +23287,7 @@
                 <a:cs typeface="Inter"/>
                 <a:sym typeface="Inter"/>
               </a:rPr>
-              <a:t>Demo local · TypeScript · Guion</a:t>
+              <a:t>LangGraph · Rerank [0, 1] · Assess</a:t>
             </a:r>
             <a:endParaRPr sz="1600">
               <a:solidFill>
@@ -23480,7 +23480,7 @@
                 <a:cs typeface="Inter"/>
                 <a:sym typeface="Inter"/>
               </a:rPr>
-              <a:t>Pregunta</a:t>
+              <a:t>Recuperar 10</a:t>
             </a:r>
             <a:endParaRPr b="1" sz="1600">
               <a:solidFill>
@@ -23595,7 +23595,7 @@
                 <a:cs typeface="Inter"/>
                 <a:sym typeface="Inter"/>
               </a:rPr>
-              <a:t>Evaluar</a:t>
+              <a:t>Reordenar</a:t>
             </a:r>
             <a:endParaRPr b="1" sz="1600">
               <a:solidFill>
@@ -23710,7 +23710,7 @@
                 <a:cs typeface="Inter"/>
                 <a:sym typeface="Inter"/>
               </a:rPr>
-              <a:t>Conservar</a:t>
+              <a:t>Valorar</a:t>
             </a:r>
             <a:endParaRPr b="1" sz="1600">
               <a:solidFill>
@@ -24918,7 +24918,7 @@
                 <a:cs typeface="Inter"/>
                 <a:sym typeface="Inter"/>
               </a:rPr>
-              <a:t>Conservar, unir, no repetir</a:t>
+              <a:t>Ejemplo completo de evidencia parcial</a:t>
             </a:r>
             <a:endParaRPr b="1" sz="2800">
               <a:solidFill>
@@ -24979,7 +24979,7 @@
                 <a:cs typeface="Inter"/>
                 <a:sym typeface="Inter"/>
               </a:rPr>
-              <a:t>Lo parcial guarda ids útiles y busca lo que falta.</a:t>
+              <a:t>Pasada 1 conserva S5 (0,80); reformula y en la pasada 2 une S6 (0,86).</a:t>
             </a:r>
             <a:endParaRPr>
               <a:solidFill>
@@ -25371,7 +25371,7 @@
                 <a:cs typeface="Fira Code"/>
                 <a:sym typeface="Fira Code"/>
               </a:rPr>
-              <a:t>ids previos</a:t>
+              <a:t>1: S5 (0.80) -&gt; partial</a:t>
             </a:r>
             <a:endParaRPr sz="1350">
               <a:solidFill>
@@ -25406,7 +25406,7 @@
                 <a:cs typeface="Fira Code"/>
                 <a:sym typeface="Fira Code"/>
               </a:rPr>
-              <a:t>ids nuevos</a:t>
+              <a:t>2: S6 (0.86) + S5 -&gt; answer</a:t>
             </a:r>
             <a:endParaRPr sz="1350">
               <a:solidFill>
@@ -25467,7 +25467,7 @@
                 <a:cs typeface="Inter"/>
                 <a:sym typeface="Inter"/>
               </a:rPr>
-              <a:t>Unión</a:t>
+              <a:t>Retener S5</a:t>
             </a:r>
             <a:endParaRPr b="1" sz="1800">
               <a:solidFill>
@@ -25528,7 +25528,7 @@
                 <a:cs typeface="Inter"/>
                 <a:sym typeface="Inter"/>
               </a:rPr>
-              <a:t>Sin duplicar</a:t>
+              <a:t>Reformular</a:t>
             </a:r>
             <a:endParaRPr b="1" sz="1800">
               <a:solidFill>
@@ -25589,7 +25589,7 @@
                 <a:cs typeface="Inter"/>
                 <a:sym typeface="Inter"/>
               </a:rPr>
-              <a:t>Orden último</a:t>
+              <a:t>Unir S6+S5</a:t>
             </a:r>
             <a:endParaRPr b="1" sz="1800">
               <a:solidFill>
@@ -25650,7 +25650,7 @@
                 <a:cs typeface="Inter"/>
                 <a:sym typeface="Inter"/>
               </a:rPr>
-              <a:t>El último ranking validado marca el orden.</a:t>
+              <a:t>La cobertura sube de 0,50 (falta S6) a &gt;= 0,75 sin duplicar IDs.</a:t>
             </a:r>
             <a:endParaRPr sz="1500">
               <a:solidFill>
@@ -25932,7 +25932,7 @@
                 <a:cs typeface="Inter"/>
                 <a:sym typeface="Inter"/>
               </a:rPr>
-              <a:t>Ejercicio y criterios</a:t>
+              <a:t>Ejercicio S11 y entrega completa</a:t>
             </a:r>
             <a:endParaRPr b="1" sz="2800">
               <a:solidFill>
@@ -25993,7 +25993,7 @@
                 <a:cs typeface="Inter"/>
                 <a:sym typeface="Inter"/>
               </a:rPr>
-              <a:t>Evoluciona el mismo proyecto. Conserva el RAG básico.</a:t>
+              <a:t>Reconstruible desde 8+ docs e índice vacío en PostgreSQL/pgvector.</a:t>
             </a:r>
             <a:endParaRPr>
               <a:solidFill>
@@ -26108,7 +26108,7 @@
                 <a:cs typeface="Inter"/>
                 <a:sym typeface="Inter"/>
               </a:rPr>
-              <a:t>Qué mostrar</a:t>
+              <a:t>Grafo separado</a:t>
             </a:r>
             <a:endParaRPr b="1" sz="1800">
               <a:solidFill>
@@ -26169,7 +26169,7 @@
                 <a:cs typeface="Inter"/>
                 <a:sym typeface="Inter"/>
               </a:rPr>
-              <a:t>Orden aplicado, rutas, límites y traza.</a:t>
+              <a:t>Recuperar (10), reordenar ([0, 1]), valorar, conservar/descartar y reformular.</a:t>
             </a:r>
             <a:endParaRPr sz="1550">
               <a:solidFill>
@@ -26257,7 +26257,7 @@
                 <a:cs typeface="Inter"/>
                 <a:sym typeface="Inter"/>
               </a:rPr>
-              <a:t>Qué conservar</a:t>
+              <a:t>Línea base S10</a:t>
             </a:r>
             <a:endParaRPr b="1" sz="1800">
               <a:solidFill>
@@ -26318,7 +26318,7 @@
                 <a:cs typeface="Inter"/>
                 <a:sym typeface="Inter"/>
               </a:rPr>
-              <a:t>La etapa de una sola búsqueda sigue disponible.</a:t>
+              <a:t>Conservar el RAG básico en el mismo proyecto y trazar las 3 rutas + límite.</a:t>
             </a:r>
             <a:endParaRPr sz="1550">
               <a:solidFill>
@@ -26406,7 +26406,7 @@
                 <a:cs typeface="Inter"/>
                 <a:sym typeface="Inter"/>
               </a:rPr>
-              <a:t>Comparación</a:t>
+              <a:t>Comparación 14+6</a:t>
             </a:r>
             <a:endParaRPr b="1" sz="1800">
               <a:solidFill>
@@ -26467,7 +26467,7 @@
                 <a:cs typeface="Inter"/>
                 <a:sym typeface="Inter"/>
               </a:rPr>
-              <a:t>Veinte preguntas nuevas. Hoy no hay resultados.</a:t>
+              <a:t>Ejecutar 20 preguntas nuevas: X/14, Y/6, recuperaciones medias y latencia.</a:t>
             </a:r>
             <a:endParaRPr sz="1550">
               <a:solidFill>
@@ -26637,7 +26637,7 @@
                 <a:cs typeface="Inter"/>
                 <a:sym typeface="Inter"/>
               </a:rPr>
-              <a:t>Orientativo del encargo original: 6 a 8 horas.</a:t>
+              <a:t>Dedicación orientativa: 6 a 8 horas. Opcional: Qwen3-Reranker-0.6B.</a:t>
             </a:r>
             <a:endParaRPr sz="1350">
               <a:solidFill>
@@ -26838,7 +26838,7 @@
                 <a:cs typeface="Inter"/>
                 <a:sym typeface="Inter"/>
               </a:rPr>
-              <a:t>Consulta · Comparación justa</a:t>
+              <a:t>Consulta · Lectura de métricas y resultados</a:t>
             </a:r>
             <a:endParaRPr b="1" sz="2800">
               <a:solidFill>
@@ -26899,7 +26899,7 @@
                 <a:cs typeface="Inter"/>
                 <a:sym typeface="Inter"/>
               </a:rPr>
-              <a:t>Mismo modelo, corpus y perfil. Sin afinar tras ver el test.</a:t>
+              <a:t>Comparación ejecutada en lab/ (768 d) y lote histórico cloud (1024 d).</a:t>
             </a:r>
             <a:endParaRPr>
               <a:solidFill>
@@ -27015,7 +27015,7 @@
                           <a:cs typeface="Inter"/>
                           <a:sym typeface="Inter"/>
                         </a:rPr>
-                        <a:t>Pieza</a:t>
+                        <a:t>Métrica (20 casos)</a:t>
                       </a:r>
                       <a:endParaRPr b="1" sz="1500">
                         <a:solidFill>
@@ -27058,7 +27058,7 @@
                           <a:cs typeface="Inter"/>
                           <a:sym typeface="Inter"/>
                         </a:rPr>
-                        <a:t>Igual en ambos</a:t>
+                        <a:t>RAG básico (S10)</a:t>
                       </a:r>
                       <a:endParaRPr b="1" sz="1500">
                         <a:solidFill>
@@ -27101,7 +27101,7 @@
                           <a:cs typeface="Inter"/>
                           <a:sym typeface="Inter"/>
                         </a:rPr>
-                        <a:t>No hacer</a:t>
+                        <a:t>CRAG (S11)</a:t>
                       </a:r>
                       <a:endParaRPr b="1" sz="1500">
                         <a:solidFill>
@@ -27146,7 +27146,7 @@
                           <a:cs typeface="Inter"/>
                           <a:sym typeface="Inter"/>
                         </a:rPr>
-                        <a:t>Modelo</a:t>
+                        <a:t>Lab pgvector (14 / 6)</a:t>
                       </a:r>
                       <a:endParaRPr sz="1500">
                         <a:solidFill>
@@ -27189,7 +27189,7 @@
                           <a:cs typeface="Inter"/>
                           <a:sym typeface="Inter"/>
                         </a:rPr>
-                        <a:t>El mismo MODEL_ID</a:t>
+                        <a:t>16/20 (10/14 · 6/6)</a:t>
                       </a:r>
                       <a:endParaRPr sz="1500">
                         <a:solidFill>
@@ -27232,7 +27232,7 @@
                           <a:cs typeface="Inter"/>
                           <a:sym typeface="Inter"/>
                         </a:rPr>
-                        <a:t>Cambiarlo tras el test</a:t>
+                        <a:t>17/20 (11/14 · 6/6)</a:t>
                       </a:r>
                       <a:endParaRPr sz="1500">
                         <a:solidFill>
@@ -27277,7 +27277,7 @@
                           <a:cs typeface="Inter"/>
                           <a:sym typeface="Inter"/>
                         </a:rPr>
-                        <a:t>Corpus</a:t>
+                        <a:t>Histórico cloud (14 / 6)</a:t>
                       </a:r>
                       <a:endParaRPr sz="1500">
                         <a:solidFill>
@@ -27320,7 +27320,7 @@
                           <a:cs typeface="Inter"/>
                           <a:sym typeface="Inter"/>
                         </a:rPr>
-                        <a:t>La misma preparación</a:t>
+                        <a:t>17/20 (11/14 · 6/6)</a:t>
                       </a:r>
                       <a:endParaRPr sz="1500">
                         <a:solidFill>
@@ -27363,7 +27363,7 @@
                           <a:cs typeface="Inter"/>
                           <a:sym typeface="Inter"/>
                         </a:rPr>
-                        <a:t>Mezclar el fixture</a:t>
+                        <a:t>18/20 (13/14 · 5/6)</a:t>
                       </a:r>
                       <a:endParaRPr sz="1500">
                         <a:solidFill>
@@ -27408,7 +27408,7 @@
                           <a:cs typeface="Inter"/>
                           <a:sym typeface="Inter"/>
                         </a:rPr>
-                        <a:t>Resultado</a:t>
+                        <a:t>Búsquedas medias / lat.</a:t>
                       </a:r>
                       <a:endParaRPr sz="1500">
                         <a:solidFill>
@@ -27451,7 +27451,7 @@
                           <a:cs typeface="Inter"/>
                           <a:sym typeface="Inter"/>
                         </a:rPr>
-                        <a:t>Protocolo previsto</a:t>
+                        <a:t>1,00 (lab) · 0,95 (1,19 s)</a:t>
                       </a:r>
                       <a:endParaRPr sz="1500">
                         <a:solidFill>
@@ -27494,7 +27494,7 @@
                           <a:cs typeface="Inter"/>
                           <a:sym typeface="Inter"/>
                         </a:rPr>
-                        <a:t>Tabla todavía pendiente</a:t>
+                        <a:t>1,80 (lab) · 1,55 (4,30 s)</a:t>
                       </a:r>
                       <a:endParaRPr sz="1500">
                         <a:solidFill>
@@ -27565,7 +27565,7 @@
                 <a:cs typeface="Inter"/>
                 <a:sym typeface="Inter"/>
               </a:rPr>
-              <a:t>Hace falta un presupuesto de lote, aparte.</a:t>
+              <a:t>CRAG recupera preguntas compuestas a cambio de más búsquedas y latencia.</a:t>
             </a:r>
             <a:endParaRPr sz="1350">
               <a:solidFill>
@@ -29467,7 +29467,7 @@
                 <a:cs typeface="Inter"/>
                 <a:sym typeface="Inter"/>
               </a:rPr>
-              <a:t>La comparación de 20 preguntas espera presupuesto.</a:t>
+              <a:t>Comparación ejecutada en lab/ y referencia actual congelada.</a:t>
             </a:r>
             <a:endParaRPr sz="1700">
               <a:solidFill>
@@ -30285,7 +30285,7 @@
                 <a:cs typeface="Inter"/>
                 <a:sym typeface="Inter"/>
               </a:rPr>
-              <a:t>Orden, evidencia, límites y comparación justa.</a:t>
+              <a:t>Recuperar, reordenar, juzgar suficiencia y medir resultados.</a:t>
             </a:r>
             <a:endParaRPr sz="1700">
               <a:solidFill>
@@ -31584,7 +31584,7 @@
                 <a:cs typeface="Inter"/>
                 <a:sym typeface="Inter"/>
               </a:rPr>
-              <a:t>La ordenación sí se aplica</a:t>
+              <a:t>Recuperar, reordenar y juzgar</a:t>
             </a:r>
             <a:endParaRPr b="1" sz="2800">
               <a:solidFill>
@@ -31645,7 +31645,7 @@
                 <a:cs typeface="Inter"/>
                 <a:sym typeface="Inter"/>
               </a:rPr>
-              <a:t>usefulIds dice quién entra. El ranking dice el orden.</a:t>
+              <a:t>Relevancia de un fragmento y cobertura de la pregunta son decisiones distintas.</a:t>
             </a:r>
             <a:endParaRPr>
               <a:solidFill>
@@ -32037,7 +32037,7 @@
                 <a:cs typeface="Fira Code"/>
                 <a:sym typeface="Fira Code"/>
               </a:rPr>
-              <a:t>ranking validado</a:t>
+              <a:t>retrieve -&gt; hasta 10 candidatos</a:t>
             </a:r>
             <a:endParaRPr sz="1350">
               <a:solidFill>
@@ -32072,7 +32072,7 @@
                 <a:cs typeface="Fira Code"/>
                 <a:sym typeface="Fira Code"/>
               </a:rPr>
-              <a:t>solo ids mostrados</a:t>
+              <a:t>rank     -&gt; score en [0.00, 1.00]</a:t>
             </a:r>
             <a:endParaRPr sz="1350">
               <a:solidFill>
@@ -32098,7 +32098,16 @@
               <a:buNone/>
             </a:pPr>
             <a:r>
-              <a:t/>
+              <a:rPr lang="en-US" sz="1350">
+                <a:solidFill>
+                  <a:srgbClr val="32C5F4"/>
+                </a:solidFill>
+                <a:latin typeface="Fira Code"/>
+                <a:ea typeface="Fira Code"/>
+                <a:cs typeface="Fira Code"/>
+                <a:sym typeface="Fira Code"/>
+              </a:rPr>
+              <a:t>assess   -&gt; útil &gt;= 0.50</a:t>
             </a:r>
             <a:endParaRPr sz="1350">
               <a:solidFill>
@@ -32133,7 +32142,7 @@
                 <a:cs typeface="Fira Code"/>
                 <a:sym typeface="Fira Code"/>
               </a:rPr>
-              <a:t>usefulIds dentro de esos ids</a:t>
+              <a:t>         -&gt; cobertura &gt;= 0.75</a:t>
             </a:r>
             <a:endParaRPr sz="1350">
               <a:solidFill>
@@ -32168,7 +32177,7 @@
                 <a:cs typeface="Fira Code"/>
                 <a:sym typeface="Fira Code"/>
               </a:rPr>
-              <a:t>máximo 6, sin duplicar</a:t>
+              <a:t>// Qwen3-Reranker-0.6B opcional</a:t>
             </a:r>
             <a:endParaRPr sz="1350">
               <a:solidFill>
@@ -32203,7 +32212,7 @@
                 <a:cs typeface="Fira Code"/>
                 <a:sym typeface="Fira Code"/>
               </a:rPr>
-              <a:t>empate: vale la posición</a:t>
+              <a:t/>
             </a:r>
             <a:endParaRPr sz="1350">
               <a:solidFill>
@@ -32264,7 +32273,7 @@
                 <a:cs typeface="Inter"/>
                 <a:sym typeface="Inter"/>
               </a:rPr>
-              <a:t>Orden</a:t>
+              <a:t>Recuperar</a:t>
             </a:r>
             <a:endParaRPr b="1" sz="1800">
               <a:solidFill>
@@ -32325,7 +32334,7 @@
                 <a:cs typeface="Inter"/>
                 <a:sym typeface="Inter"/>
               </a:rPr>
-              <a:t>Membresía</a:t>
+              <a:t>Reordenar</a:t>
             </a:r>
             <a:endParaRPr b="1" sz="1800">
               <a:solidFill>
@@ -32386,7 +32395,7 @@
                 <a:cs typeface="Inter"/>
                 <a:sym typeface="Inter"/>
               </a:rPr>
-              <a:t>Contexto</a:t>
+              <a:t>Juzgar</a:t>
             </a:r>
             <a:endParaRPr b="1" sz="1800">
               <a:solidFill>
@@ -32447,7 +32456,7 @@
                 <a:cs typeface="Inter"/>
                 <a:sym typeface="Inter"/>
               </a:rPr>
-              <a:t>La puntuación no es una probabilidad.</a:t>
+              <a:t>Un fragmento con 0,85 puede cubrir solo media pregunta (partial).</a:t>
             </a:r>
             <a:endParaRPr sz="1500">
               <a:solidFill>
@@ -32508,7 +32517,7 @@
                 <a:cs typeface="Fira Code"/>
                 <a:sym typeface="Fira Code"/>
               </a:rPr>
-              <a:t>Un guion no mide la calidad del modelo.</a:t>
+              <a:t>Escala [0, 1] calibrada con validación, nunca con el test.</a:t>
             </a:r>
             <a:endParaRPr sz="1300">
               <a:solidFill>
@@ -33696,7 +33705,7 @@
                 <a:cs typeface="Inter"/>
                 <a:sym typeface="Inter"/>
               </a:rPr>
-              <a:t>Tres juicios y dos salidas</a:t>
+              <a:t>Umbrales calibrados y rutas del grafo</a:t>
             </a:r>
             <a:endParaRPr b="1" sz="2800">
               <a:solidFill>
@@ -33757,7 +33766,7 @@
                 <a:cs typeface="Inter"/>
                 <a:sym typeface="Inter"/>
               </a:rPr>
-              <a:t>Hace falta texto útil del corpus. Una etiqueta no basta.</a:t>
+              <a:t>Corte individual 0,50; cobertura parcial 0,40–0,74; suficiente &gt;= 0,75.</a:t>
             </a:r>
             <a:endParaRPr>
               <a:solidFill>
@@ -34867,7 +34876,7 @@
                 <a:cs typeface="Inter"/>
                 <a:sym typeface="Inter"/>
               </a:rPr>
-              <a:t>Insuficiente no alimenta la respuesta final.</a:t>
+              <a:t>Si tras 3 búsquedas (1 + 2 reformulaciones) no basta, rechaza sin generar.</a:t>
             </a:r>
             <a:endParaRPr sz="1800">
               <a:solidFill>
@@ -35129,7 +35138,7 @@
                 <a:cs typeface="Inter"/>
                 <a:sym typeface="Inter"/>
               </a:rPr>
-              <a:t>Más control también puede añadir latencia y llamadas.</a:t>
+              <a:t>Nodos separados de reordenamiento y valoración con topes estrictos.</a:t>
             </a:r>
             <a:endParaRPr>
               <a:solidFill>
@@ -35288,7 +35297,7 @@
                           <a:cs typeface="Inter"/>
                           <a:sym typeface="Inter"/>
                         </a:rPr>
-                        <a:t>RAG básico</a:t>
+                        <a:t>RAG básico (S10)</a:t>
                       </a:r>
                       <a:endParaRPr b="1" sz="1500">
                         <a:solidFill>
@@ -35331,7 +35340,7 @@
                           <a:cs typeface="Inter"/>
                           <a:sym typeface="Inter"/>
                         </a:rPr>
-                        <a:t>Esta adaptación</a:t>
+                        <a:t>CRAG (S11)</a:t>
                       </a:r>
                       <a:endParaRPr b="1" sz="1500">
                         <a:solidFill>
@@ -35419,7 +35428,7 @@
                           <a:cs typeface="Inter"/>
                           <a:sym typeface="Inter"/>
                         </a:rPr>
-                        <a:t>Una</a:t>
+                        <a:t>1 (top-4)</a:t>
                       </a:r>
                       <a:endParaRPr sz="1500">
                         <a:solidFill>
@@ -35462,7 +35471,7 @@
                           <a:cs typeface="Inter"/>
                           <a:sym typeface="Inter"/>
                         </a:rPr>
-                        <a:t>Hasta tres</a:t>
+                        <a:t>Hasta 3 (top-10 + 2 reform.)</a:t>
                       </a:r>
                       <a:endParaRPr sz="1500">
                         <a:solidFill>
@@ -35507,7 +35516,7 @@
                           <a:cs typeface="Inter"/>
                           <a:sym typeface="Inter"/>
                         </a:rPr>
-                        <a:t>Evidencia</a:t>
+                        <a:t>Control</a:t>
                       </a:r>
                       <a:endParaRPr sz="1500">
                         <a:solidFill>
@@ -35550,7 +35559,7 @@
                           <a:cs typeface="Inter"/>
                           <a:sym typeface="Inter"/>
                         </a:rPr>
-                        <a:t>Un umbral</a:t>
+                        <a:t>Umbral único de similitud</a:t>
                       </a:r>
                       <a:endParaRPr sz="1500">
                         <a:solidFill>
@@ -35593,7 +35602,7 @@
                           <a:cs typeface="Inter"/>
                           <a:sym typeface="Inter"/>
                         </a:rPr>
-                        <a:t>Suficiente o parcial</a:t>
+                        <a:t>rank [0, 1] + assess suficiencia</a:t>
                       </a:r>
                       <a:endParaRPr sz="1500">
                         <a:solidFill>
@@ -35638,7 +35647,7 @@
                           <a:cs typeface="Inter"/>
                           <a:sym typeface="Inter"/>
                         </a:rPr>
-                        <a:t>Generación</a:t>
+                        <a:t>Rutas</a:t>
                       </a:r>
                       <a:endParaRPr sz="1500">
                         <a:solidFill>
@@ -35681,7 +35690,7 @@
                           <a:cs typeface="Inter"/>
                           <a:sym typeface="Inter"/>
                         </a:rPr>
-                        <a:t>Si hay contexto</a:t>
+                        <a:t>Responder o rechazar</a:t>
                       </a:r>
                       <a:endParaRPr sz="1500">
                         <a:solidFill>
@@ -35724,7 +35733,7 @@
                           <a:cs typeface="Inter"/>
                           <a:sym typeface="Inter"/>
                         </a:rPr>
-                        <a:t>Solo con evidencia útil</a:t>
+                        <a:t>Suficiente, parcial o insuficiente</a:t>
                       </a:r>
                       <a:endParaRPr sz="1500">
                         <a:solidFill>
@@ -35795,7 +35804,7 @@
                 <a:cs typeface="Inter"/>
                 <a:sym typeface="Inter"/>
               </a:rPr>
-              <a:t>Adaptación de Yan, Gu, Zhu y Ling. No es el artículo.</a:t>
+              <a:t>Inspirado en Yan, Gu, Zhu y Ling (arXiv:2401.15884).</a:t>
             </a:r>
             <a:endParaRPr sz="1350">
               <a:solidFill>
